--- a/final exam2/BigData_RAG_答辩演示.pptx
+++ b/final exam2/BigData_RAG_答辩演示.pptx
@@ -23,6 +23,7 @@
     <p:sldId id="271" r:id="rId22"/>
     <p:sldId id="272" r:id="rId23"/>
     <p:sldId id="273" r:id="rId24"/>
+    <p:sldId id="274" r:id="rId25"/>
   </p:sldIdLst>
   <p:sldSz cx="12191695" cy="6858000" type="screen4x3"/>
   <p:notesSz cx="6858000" cy="9144000"/>
@@ -6235,7 +6236,7 @@
               </a:defRPr>
             </a:pPr>
             <a:r>
-              <a:t>测试覆盖（45 个以上用例）</a:t>
+              <a:t>测试覆盖（68 个测试用例）</a:t>
             </a:r>
           </a:p>
         </p:txBody>
@@ -6271,7 +6272,7 @@
               </a:defRPr>
             </a:pPr>
             <a:r>
-              <a:t>  * test_preprocess - 清洗/分块/分类</a:t>
+              <a:t>  * test_preprocess - 清洗/分块/元数据/异常</a:t>
             </a:r>
           </a:p>
         </p:txBody>
@@ -6307,7 +6308,7 @@
               </a:defRPr>
             </a:pPr>
             <a:r>
-              <a:t>  * test_ingest - Front-Matter 解析</a:t>
+              <a:t>  * test_ingest - 嵌套 YAML 解析与异常退避</a:t>
             </a:r>
           </a:p>
         </p:txBody>
@@ -6343,7 +6344,7 @@
               </a:defRPr>
             </a:pPr>
             <a:r>
-              <a:t>  * test_query_parser - 正常/异常/回退</a:t>
+              <a:t>  * test_query_parser - 格式错误与降级过滤</a:t>
             </a:r>
           </a:p>
         </p:txBody>
@@ -6379,7 +6380,7 @@
               </a:defRPr>
             </a:pPr>
             <a:r>
-              <a:t>  * test_embed_store - 搜索/过滤/删除</a:t>
+              <a:t>  * test_embed_store - upsert/where_document 过滤</a:t>
             </a:r>
           </a:p>
         </p:txBody>
@@ -6415,7 +6416,7 @@
               </a:defRPr>
             </a:pPr>
             <a:r>
-              <a:t>  * test_qa - 空文档/上下文/引用</a:t>
+              <a:t>  * test_qa - 超长熔断/多轮会话/防幻觉</a:t>
             </a:r>
           </a:p>
         </p:txBody>
@@ -6451,7 +6452,7 @@
               </a:defRPr>
             </a:pPr>
             <a:r>
-              <a:t>  * test_integration - 全链路集成</a:t>
+              <a:t>  * test_integration - 整体全链路冒烟测试</a:t>
             </a:r>
           </a:p>
         </p:txBody>
@@ -6523,7 +6524,7 @@
               </a:defRPr>
             </a:pPr>
             <a:r>
-              <a:t>  * 每个公开函数覆盖正常加回退路径</a:t>
+              <a:t>  * 68 个测试用例 100% 成功通过 (Passed)</a:t>
             </a:r>
           </a:p>
         </p:txBody>
@@ -6987,7 +6988,7 @@
               </a:defRPr>
             </a:pPr>
             <a:r>
-              <a:t>46 篇</a:t>
+              <a:t>45 篇</a:t>
             </a:r>
           </a:p>
         </p:txBody>
@@ -7102,7 +7103,7 @@
               </a:defRPr>
             </a:pPr>
             <a:r>
-              <a:t>52 篇</a:t>
+              <a:t>83 篇</a:t>
             </a:r>
           </a:p>
         </p:txBody>
@@ -7217,7 +7218,7 @@
               </a:defRPr>
             </a:pPr>
             <a:r>
-              <a:t>98 篇</a:t>
+              <a:t>176 篇</a:t>
             </a:r>
           </a:p>
         </p:txBody>
@@ -7447,7 +7448,7 @@
               </a:defRPr>
             </a:pPr>
             <a:r>
-              <a:t>约 130-150 个</a:t>
+              <a:t>约 450+ 个</a:t>
             </a:r>
           </a:p>
         </p:txBody>
@@ -7562,7 +7563,7 @@
               </a:defRPr>
             </a:pPr>
             <a:r>
-              <a:t>元数据提取 98 次</a:t>
+              <a:t>元数据提取 176 次</a:t>
             </a:r>
           </a:p>
         </p:txBody>
@@ -7575,8 +7576,8 @@
         </p:nvSpPr>
         <p:spPr>
           <a:xfrm>
-            <a:off x="9326880" y="2011680"/>
-            <a:ext cx="2286000" cy="320040"/>
+            <a:off x="6583680" y="2011680"/>
+            <a:ext cx="4572000" cy="320040"/>
           </a:xfrm>
           <a:prstGeom prst="rect">
             <a:avLst/>
@@ -7598,7 +7599,7 @@
               </a:defRPr>
             </a:pPr>
             <a:r>
-              <a:t>约 0.3 元</a:t>
+              <a:t>约 0.5 元</a:t>
             </a:r>
           </a:p>
         </p:txBody>
@@ -7647,8 +7648,8 @@
         </p:nvSpPr>
         <p:spPr>
           <a:xfrm>
-            <a:off x="9326880" y="2514600"/>
-            <a:ext cx="2286000" cy="320040"/>
+            <a:off x="6583680" y="2514600"/>
+            <a:ext cx="4572000" cy="320040"/>
           </a:xfrm>
           <a:prstGeom prst="rect">
             <a:avLst/>
@@ -7719,8 +7720,8 @@
         </p:nvSpPr>
         <p:spPr>
           <a:xfrm>
-            <a:off x="9326880" y="3017520"/>
-            <a:ext cx="2286000" cy="320040"/>
+            <a:off x="6583680" y="3017520"/>
+            <a:ext cx="4572000" cy="320040"/>
           </a:xfrm>
           <a:prstGeom prst="rect">
             <a:avLst/>
@@ -7791,8 +7792,8 @@
         </p:nvSpPr>
         <p:spPr>
           <a:xfrm>
-            <a:off x="9326880" y="3520440"/>
-            <a:ext cx="2286000" cy="320040"/>
+            <a:off x="6583680" y="3520440"/>
+            <a:ext cx="4572000" cy="320040"/>
           </a:xfrm>
           <a:prstGeom prst="rect">
             <a:avLst/>
@@ -7863,8 +7864,8 @@
         </p:nvSpPr>
         <p:spPr>
           <a:xfrm>
-            <a:off x="9326880" y="4023360"/>
-            <a:ext cx="2286000" cy="320040"/>
+            <a:off x="6583680" y="4023360"/>
+            <a:ext cx="4572000" cy="320040"/>
           </a:xfrm>
           <a:prstGeom prst="rect">
             <a:avLst/>
@@ -7886,7 +7887,7 @@
               </a:defRPr>
             </a:pPr>
             <a:r>
-              <a:t>小于 0.5 元</a:t>
+              <a:t>小于 0.8 元</a:t>
             </a:r>
           </a:p>
         </p:txBody>
@@ -7935,8 +7936,8 @@
         </p:nvSpPr>
         <p:spPr>
           <a:xfrm>
-            <a:off x="9326880" y="4526280"/>
-            <a:ext cx="2286000" cy="320040"/>
+            <a:off x="6583680" y="4526280"/>
+            <a:ext cx="4572000" cy="320040"/>
           </a:xfrm>
           <a:prstGeom prst="rect">
             <a:avLst/>
@@ -8037,7 +8038,7 @@
               </a:defRPr>
             </a:pPr>
             <a:r>
-              <a:t>98</a:t>
+              <a:t>176</a:t>
             </a:r>
           </a:p>
         </p:txBody>
@@ -8152,7 +8153,7 @@
               </a:defRPr>
             </a:pPr>
             <a:r>
-              <a:t>130+</a:t>
+              <a:t>450+</a:t>
             </a:r>
           </a:p>
         </p:txBody>
@@ -8267,7 +8268,7 @@
               </a:defRPr>
             </a:pPr>
             <a:r>
-              <a:t>&lt;0.5 元</a:t>
+              <a:t>&lt;0.8 元</a:t>
             </a:r>
           </a:p>
         </p:txBody>
@@ -8612,7 +8613,7 @@
               </a:defRPr>
             </a:pPr>
             <a:r>
-              <a:t>45+</a:t>
+              <a:t>68</a:t>
             </a:r>
           </a:p>
         </p:txBody>
@@ -13612,21 +13613,57 @@
               </a:defRPr>
             </a:pPr>
             <a:r>
-              <a:t>九、演示方案与答辩准备</a:t>
-            </a:r>
-          </a:p>
-        </p:txBody>
-      </p:sp>
-      <p:sp>
-        <p:nvSpPr>
-          <p:cNvPr id="5" name="Rectangle 4"/>
+              <a:t>九、团队分工与板块技术汇报</a:t>
+            </a:r>
+          </a:p>
+        </p:txBody>
+      </p:sp>
+      <p:sp>
+        <p:nvSpPr>
+          <p:cNvPr id="5" name="TextBox 4"/>
+          <p:cNvSpPr txBox="1"/>
+          <p:nvPr/>
+        </p:nvSpPr>
+        <p:spPr>
+          <a:xfrm>
+            <a:off x="548640" y="502920"/>
+            <a:ext cx="9144000" cy="320040"/>
+          </a:xfrm>
+          <a:prstGeom prst="rect">
+            <a:avLst/>
+          </a:prstGeom>
+          <a:noFill/>
+        </p:spPr>
+        <p:txBody>
+          <a:bodyPr wrap="square">
+            <a:spAutoFit/>
+          </a:bodyPr>
+          <a:lstStyle/>
+          <a:p>
+            <a:pPr algn="l">
+              <a:defRPr sz="1400" b="0">
+                <a:solidFill>
+                  <a:srgbClr val="94A3B8"/>
+                </a:solidFill>
+                <a:latin typeface="Microsoft YaHei"/>
+              </a:defRPr>
+            </a:pPr>
+            <a:r>
+              <a:t>四人团队紧密协作：职责明确、模块闭环，实现工业级高敏捷交付</a:t>
+            </a:r>
+          </a:p>
+        </p:txBody>
+      </p:sp>
+      <p:sp>
+        <p:nvSpPr>
+          <p:cNvPr id="6" name="Rectangle 5"/>
           <p:cNvSpPr/>
           <p:nvPr/>
         </p:nvSpPr>
         <p:spPr>
           <a:xfrm>
             <a:off x="548640" y="1371600"/>
-            <a:ext cx="5303520" cy="3840480"/>
+            <a:ext cx="5303520" cy="2331720"/>
           </a:xfrm>
           <a:prstGeom prst="rect">
             <a:avLst/>
@@ -13662,7 +13699,7 @@
       </p:sp>
       <p:sp>
         <p:nvSpPr>
-          <p:cNvPr id="6" name="Rectangle 5"/>
+          <p:cNvPr id="7" name="Rectangle 6"/>
           <p:cNvSpPr/>
           <p:nvPr/>
         </p:nvSpPr>
@@ -13705,7 +13742,7 @@
       </p:sp>
       <p:sp>
         <p:nvSpPr>
-          <p:cNvPr id="7" name="TextBox 6"/>
+          <p:cNvPr id="8" name="TextBox 7"/>
           <p:cNvSpPr txBox="1"/>
           <p:nvPr/>
         </p:nvSpPr>
@@ -13734,14 +13771,14 @@
               </a:defRPr>
             </a:pPr>
             <a:r>
-              <a:t>CLI 演示（3 分钟）</a:t>
-            </a:r>
-          </a:p>
-        </p:txBody>
-      </p:sp>
-      <p:sp>
-        <p:nvSpPr>
-          <p:cNvPr id="8" name="TextBox 7"/>
+              <a:t>👑 队长（项目统筹 &amp; RAG 架构师）</a:t>
+            </a:r>
+          </a:p>
+        </p:txBody>
+      </p:sp>
+      <p:sp>
+        <p:nvSpPr>
+          <p:cNvPr id="9" name="TextBox 8"/>
           <p:cNvSpPr txBox="1"/>
           <p:nvPr/>
         </p:nvSpPr>
@@ -13770,14 +13807,14 @@
               </a:defRPr>
             </a:pPr>
             <a:r>
-              <a:t>  * 知识库问答：查询提交截止日期</a:t>
-            </a:r>
-          </a:p>
-        </p:txBody>
-      </p:sp>
-      <p:sp>
-        <p:nvSpPr>
-          <p:cNvPr id="9" name="TextBox 8"/>
+              <a:t>  * 顶层系统架构设计与核心流水线规制</a:t>
+            </a:r>
+          </a:p>
+        </p:txBody>
+      </p:sp>
+      <p:sp>
+        <p:nvSpPr>
+          <p:cNvPr id="10" name="TextBox 9"/>
           <p:cNvSpPr txBox="1"/>
           <p:nvPr/>
         </p:nvSpPr>
@@ -13806,14 +13843,14 @@
               </a:defRPr>
             </a:pPr>
             <a:r>
-              <a:t>  * 跨文档综合：什么是 RAG</a:t>
-            </a:r>
-          </a:p>
-        </p:txBody>
-      </p:sp>
-      <p:sp>
-        <p:nvSpPr>
-          <p:cNvPr id="10" name="TextBox 9"/>
+              <a:t>  * embed_store.py: upsert 幂等与 where_document 检索优化</a:t>
+            </a:r>
+          </a:p>
+        </p:txBody>
+      </p:sp>
+      <p:sp>
+        <p:nvSpPr>
+          <p:cNvPr id="11" name="TextBox 10"/>
           <p:cNvSpPr txBox="1"/>
           <p:nvPr/>
         </p:nvSpPr>
@@ -13842,14 +13879,14 @@
               </a:defRPr>
             </a:pPr>
             <a:r>
-              <a:t>  * 拒答演示：查询无关问题</a:t>
-            </a:r>
-          </a:p>
-        </p:txBody>
-      </p:sp>
-      <p:sp>
-        <p:nvSpPr>
-          <p:cNvPr id="11" name="TextBox 10"/>
+              <a:t>  * preprocess.py: 四级语义退避分块算法</a:t>
+            </a:r>
+          </a:p>
+        </p:txBody>
+      </p:sp>
+      <p:sp>
+        <p:nvSpPr>
+          <p:cNvPr id="12" name="TextBox 11"/>
           <p:cNvSpPr txBox="1"/>
           <p:nvPr/>
         </p:nvSpPr>
@@ -13878,21 +13915,21 @@
               </a:defRPr>
             </a:pPr>
             <a:r>
-              <a:t>  * 展示查询解析过程</a:t>
-            </a:r>
-          </a:p>
-        </p:txBody>
-      </p:sp>
-      <p:sp>
-        <p:nvSpPr>
-          <p:cNvPr id="12" name="Rectangle 11"/>
+              <a:t>  * 核心技术攻坚与全链路安全降级回退机制</a:t>
+            </a:r>
+          </a:p>
+        </p:txBody>
+      </p:sp>
+      <p:sp>
+        <p:nvSpPr>
+          <p:cNvPr id="13" name="Rectangle 12"/>
           <p:cNvSpPr/>
           <p:nvPr/>
         </p:nvSpPr>
         <p:spPr>
           <a:xfrm>
             <a:off x="6309360" y="1371600"/>
-            <a:ext cx="5303520" cy="3840480"/>
+            <a:ext cx="5303520" cy="2331720"/>
           </a:xfrm>
           <a:prstGeom prst="rect">
             <a:avLst/>
@@ -13928,7 +13965,7 @@
       </p:sp>
       <p:sp>
         <p:nvSpPr>
-          <p:cNvPr id="13" name="Rectangle 12"/>
+          <p:cNvPr id="14" name="Rectangle 13"/>
           <p:cNvSpPr/>
           <p:nvPr/>
         </p:nvSpPr>
@@ -13971,7 +14008,7 @@
       </p:sp>
       <p:sp>
         <p:nvSpPr>
-          <p:cNvPr id="14" name="TextBox 13"/>
+          <p:cNvPr id="15" name="TextBox 14"/>
           <p:cNvSpPr txBox="1"/>
           <p:nvPr/>
         </p:nvSpPr>
@@ -14000,14 +14037,14 @@
               </a:defRPr>
             </a:pPr>
             <a:r>
-              <a:t>Streamlit 演示（5 分钟）</a:t>
-            </a:r>
-          </a:p>
-        </p:txBody>
-      </p:sp>
-      <p:sp>
-        <p:nvSpPr>
-          <p:cNvPr id="15" name="TextBox 14"/>
+              <a:t>🧑‍💻 成员 B（数据工程师）</a:t>
+            </a:r>
+          </a:p>
+        </p:txBody>
+      </p:sp>
+      <p:sp>
+        <p:nvSpPr>
+          <p:cNvPr id="16" name="TextBox 15"/>
           <p:cNvSpPr txBox="1"/>
           <p:nvPr/>
         </p:nvSpPr>
@@ -14036,14 +14073,14 @@
               </a:defRPr>
             </a:pPr>
             <a:r>
-              <a:t>  * 侧边栏展示文档块数和来源</a:t>
-            </a:r>
-          </a:p>
-        </p:txBody>
-      </p:sp>
-      <p:sp>
-        <p:nvSpPr>
-          <p:cNvPr id="16" name="TextBox 15"/>
+              <a:t>  * 多源离线爬取与 HTML -&gt; MD 规范转换</a:t>
+            </a:r>
+          </a:p>
+        </p:txBody>
+      </p:sp>
+      <p:sp>
+        <p:nvSpPr>
+          <p:cNvPr id="17" name="TextBox 16"/>
           <p:cNvSpPr txBox="1"/>
           <p:nvPr/>
         </p:nvSpPr>
@@ -14072,14 +14109,14 @@
               </a:defRPr>
             </a:pPr>
             <a:r>
-              <a:t>  * 连续提问展示对话历史</a:t>
-            </a:r>
-          </a:p>
-        </p:txBody>
-      </p:sp>
-      <p:sp>
-        <p:nvSpPr>
-          <p:cNvPr id="17" name="TextBox 16"/>
+              <a:t>  * 32 线程并发元数据提取（ThreadPoolExecutor）</a:t>
+            </a:r>
+          </a:p>
+        </p:txBody>
+      </p:sp>
+      <p:sp>
+        <p:nvSpPr>
+          <p:cNvPr id="18" name="TextBox 17"/>
           <p:cNvSpPr txBox="1"/>
           <p:nvPr/>
         </p:nvSpPr>
@@ -14108,14 +14145,14 @@
               </a:defRPr>
             </a:pPr>
             <a:r>
-              <a:t>  * 调试模式展示搜索词和过滤条件</a:t>
-            </a:r>
-          </a:p>
-        </p:txBody>
-      </p:sp>
-      <p:sp>
-        <p:nvSpPr>
-          <p:cNvPr id="18" name="TextBox 17"/>
+              <a:t>  * 429 限流退避算法：扰动指数自适应重试</a:t>
+            </a:r>
+          </a:p>
+        </p:txBody>
+      </p:sp>
+      <p:sp>
+        <p:nvSpPr>
+          <p:cNvPr id="19" name="TextBox 18"/>
           <p:cNvSpPr txBox="1"/>
           <p:nvPr/>
         </p:nvSpPr>
@@ -14144,43 +14181,7 @@
               </a:defRPr>
             </a:pPr>
             <a:r>
-              <a:t>  * 调节 Top-K 和最大距离阈值</a:t>
-            </a:r>
-          </a:p>
-        </p:txBody>
-      </p:sp>
-      <p:sp>
-        <p:nvSpPr>
-          <p:cNvPr id="19" name="TextBox 18"/>
-          <p:cNvSpPr txBox="1"/>
-          <p:nvPr/>
-        </p:nvSpPr>
-        <p:spPr>
-          <a:xfrm>
-            <a:off x="6492240" y="2898648"/>
-            <a:ext cx="4937760" cy="237744"/>
-          </a:xfrm>
-          <a:prstGeom prst="rect">
-            <a:avLst/>
-          </a:prstGeom>
-          <a:noFill/>
-        </p:spPr>
-        <p:txBody>
-          <a:bodyPr wrap="square">
-            <a:spAutoFit/>
-          </a:bodyPr>
-          <a:lstStyle/>
-          <a:p>
-            <a:pPr algn="l">
-              <a:defRPr sz="1200" b="0">
-                <a:solidFill>
-                  <a:srgbClr val="1E293B"/>
-                </a:solidFill>
-                <a:latin typeface="Microsoft YaHei"/>
-              </a:defRPr>
-            </a:pPr>
-            <a:r>
-              <a:t>  * 展开检索来源查看分数</a:t>
+              <a:t>  * clean_text(): 标签、实体、控制符、空白四步清洗</a:t>
             </a:r>
           </a:p>
         </p:txBody>
@@ -14193,8 +14194,8 @@
         </p:nvSpPr>
         <p:spPr>
           <a:xfrm>
-            <a:off x="548640" y="5029200"/>
-            <a:ext cx="11064240" cy="1371600"/>
+            <a:off x="548640" y="3886200"/>
+            <a:ext cx="5303520" cy="2331720"/>
           </a:xfrm>
           <a:prstGeom prst="rect">
             <a:avLst/>
@@ -14236,14 +14237,14 @@
         </p:nvSpPr>
         <p:spPr>
           <a:xfrm>
-            <a:off x="548640" y="5029200"/>
-            <a:ext cx="54864" cy="1371600"/>
+            <a:off x="566928" y="3904488"/>
+            <a:ext cx="5266944" cy="36576"/>
           </a:xfrm>
           <a:prstGeom prst="rect">
             <a:avLst/>
           </a:prstGeom>
           <a:solidFill>
-            <a:srgbClr val="0D233F"/>
+            <a:srgbClr val="F59E0B"/>
           </a:solidFill>
           <a:ln>
             <a:noFill/>
@@ -14279,8 +14280,8 @@
         </p:nvSpPr>
         <p:spPr>
           <a:xfrm>
-            <a:off x="822960" y="5120640"/>
-            <a:ext cx="10515600" cy="274320"/>
+            <a:off x="731520" y="4023360"/>
+            <a:ext cx="4937760" cy="274320"/>
           </a:xfrm>
           <a:prstGeom prst="rect">
             <a:avLst/>
@@ -14296,13 +14297,13 @@
             <a:pPr algn="l">
               <a:defRPr sz="1600" b="1">
                 <a:solidFill>
-                  <a:srgbClr val="0D233F"/>
-                </a:solidFill>
-                <a:latin typeface="Microsoft YaHei"/>
-              </a:defRPr>
-            </a:pPr>
-            <a:r>
-              <a:t>答辩 Q&amp;A 准备</a:t>
+                  <a:srgbClr val="F59E0B"/>
+                </a:solidFill>
+                <a:latin typeface="Microsoft YaHei"/>
+              </a:defRPr>
+            </a:pPr>
+            <a:r>
+              <a:t>🎨 成员 C（前端开发工程师）</a:t>
             </a:r>
           </a:p>
         </p:txBody>
@@ -14315,30 +14316,30 @@
         </p:nvSpPr>
         <p:spPr>
           <a:xfrm>
-            <a:off x="822960" y="5440680"/>
-            <a:ext cx="274320" cy="228600"/>
-          </a:xfrm>
-          <a:prstGeom prst="rect">
-            <a:avLst/>
-          </a:prstGeom>
-          <a:noFill/>
-        </p:spPr>
-        <p:txBody>
-          <a:bodyPr wrap="square">
-            <a:spAutoFit/>
-          </a:bodyPr>
-          <a:lstStyle/>
-          <a:p>
-            <a:pPr algn="l">
-              <a:defRPr sz="1100" b="1">
-                <a:solidFill>
-                  <a:srgbClr val="F59E0B"/>
-                </a:solidFill>
-                <a:latin typeface="Microsoft YaHei"/>
-              </a:defRPr>
-            </a:pPr>
-            <a:r>
-              <a:t>问：</a:t>
+            <a:off x="731520" y="4389120"/>
+            <a:ext cx="4937760" cy="237744"/>
+          </a:xfrm>
+          <a:prstGeom prst="rect">
+            <a:avLst/>
+          </a:prstGeom>
+          <a:noFill/>
+        </p:spPr>
+        <p:txBody>
+          <a:bodyPr wrap="square">
+            <a:spAutoFit/>
+          </a:bodyPr>
+          <a:lstStyle/>
+          <a:p>
+            <a:pPr algn="l">
+              <a:defRPr sz="1200" b="0">
+                <a:solidFill>
+                  <a:srgbClr val="1E293B"/>
+                </a:solidFill>
+                <a:latin typeface="Microsoft YaHei"/>
+              </a:defRPr>
+            </a:pPr>
+            <a:r>
+              <a:t>  * app/style.css: 流畅毛玻璃与深色微动画重塑</a:t>
             </a:r>
           </a:p>
         </p:txBody>
@@ -14351,22 +14352,22 @@
         </p:nvSpPr>
         <p:spPr>
           <a:xfrm>
-            <a:off x="1051560" y="5440680"/>
-            <a:ext cx="3200400" cy="228600"/>
-          </a:xfrm>
-          <a:prstGeom prst="rect">
-            <a:avLst/>
-          </a:prstGeom>
-          <a:noFill/>
-        </p:spPr>
-        <p:txBody>
-          <a:bodyPr wrap="square">
-            <a:spAutoFit/>
-          </a:bodyPr>
-          <a:lstStyle/>
-          <a:p>
-            <a:pPr algn="l">
-              <a:defRPr sz="1100" b="0">
+            <a:off x="731520" y="4645152"/>
+            <a:ext cx="4937760" cy="237744"/>
+          </a:xfrm>
+          <a:prstGeom prst="rect">
+            <a:avLst/>
+          </a:prstGeom>
+          <a:noFill/>
+        </p:spPr>
+        <p:txBody>
+          <a:bodyPr wrap="square">
+            <a:spAutoFit/>
+          </a:bodyPr>
+          <a:lstStyle/>
+          <a:p>
+            <a:pPr algn="l">
+              <a:defRPr sz="1200" b="0">
                 <a:solidFill>
                   <a:srgbClr val="1E293B"/>
                 </a:solidFill>
@@ -14374,7 +14375,7 @@
               </a:defRPr>
             </a:pPr>
             <a:r>
-              <a:t>Embedding API 限流怎么办？</a:t>
+              <a:t>  * session_state 多轮对话历史状态管理</a:t>
             </a:r>
           </a:p>
         </p:txBody>
@@ -14387,30 +14388,30 @@
         </p:nvSpPr>
         <p:spPr>
           <a:xfrm>
-            <a:off x="4251960" y="5440680"/>
-            <a:ext cx="274320" cy="228600"/>
-          </a:xfrm>
-          <a:prstGeom prst="rect">
-            <a:avLst/>
-          </a:prstGeom>
-          <a:noFill/>
-        </p:spPr>
-        <p:txBody>
-          <a:bodyPr wrap="square">
-            <a:spAutoFit/>
-          </a:bodyPr>
-          <a:lstStyle/>
-          <a:p>
-            <a:pPr algn="l">
-              <a:defRPr sz="1100" b="1">
-                <a:solidFill>
-                  <a:srgbClr val="10B981"/>
-                </a:solidFill>
-                <a:latin typeface="Microsoft YaHei"/>
-              </a:defRPr>
-            </a:pPr>
-            <a:r>
-              <a:t>答：</a:t>
+            <a:off x="731520" y="4901184"/>
+            <a:ext cx="4937760" cy="237744"/>
+          </a:xfrm>
+          <a:prstGeom prst="rect">
+            <a:avLst/>
+          </a:prstGeom>
+          <a:noFill/>
+        </p:spPr>
+        <p:txBody>
+          <a:bodyPr wrap="square">
+            <a:spAutoFit/>
+          </a:bodyPr>
+          <a:lstStyle/>
+          <a:p>
+            <a:pPr algn="l">
+              <a:defRPr sz="1200" b="0">
+                <a:solidFill>
+                  <a:srgbClr val="1E293B"/>
+                </a:solidFill>
+                <a:latin typeface="Microsoft YaHei"/>
+              </a:defRPr>
+            </a:pPr>
+            <a:r>
+              <a:t>  * 调试模式折叠面板与 Top-K/阈值滑块参数联动</a:t>
             </a:r>
           </a:p>
         </p:txBody>
@@ -14423,22 +14424,22 @@
         </p:nvSpPr>
         <p:spPr>
           <a:xfrm>
-            <a:off x="4480560" y="5440680"/>
-            <a:ext cx="6858000" cy="228600"/>
-          </a:xfrm>
-          <a:prstGeom prst="rect">
-            <a:avLst/>
-          </a:prstGeom>
-          <a:noFill/>
-        </p:spPr>
-        <p:txBody>
-          <a:bodyPr wrap="square">
-            <a:spAutoFit/>
-          </a:bodyPr>
-          <a:lstStyle/>
-          <a:p>
-            <a:pPr algn="l">
-              <a:defRPr sz="1100" b="0">
+            <a:off x="731520" y="5157216"/>
+            <a:ext cx="4937760" cy="237744"/>
+          </a:xfrm>
+          <a:prstGeom prst="rect">
+            <a:avLst/>
+          </a:prstGeom>
+          <a:noFill/>
+        </p:spPr>
+        <p:txBody>
+          <a:bodyPr wrap="square">
+            <a:spAutoFit/>
+          </a:bodyPr>
+          <a:lstStyle/>
+          <a:p>
+            <a:pPr algn="l">
+              <a:defRPr sz="1200" b="0">
                 <a:solidFill>
                   <a:srgbClr val="1E293B"/>
                 </a:solidFill>
@@ -14446,71 +14447,157 @@
               </a:defRPr>
             </a:pPr>
             <a:r>
-              <a:t>本地 GPU 嵌入，完全离线不存在限流问题</a:t>
-            </a:r>
-          </a:p>
-        </p:txBody>
-      </p:sp>
-      <p:sp>
-        <p:nvSpPr>
-          <p:cNvPr id="27" name="TextBox 26"/>
-          <p:cNvSpPr txBox="1"/>
-          <p:nvPr/>
-        </p:nvSpPr>
-        <p:spPr>
-          <a:xfrm>
-            <a:off x="822960" y="5715000"/>
-            <a:ext cx="274320" cy="228600"/>
-          </a:xfrm>
-          <a:prstGeom prst="rect">
-            <a:avLst/>
-          </a:prstGeom>
-          <a:noFill/>
-        </p:spPr>
-        <p:txBody>
-          <a:bodyPr wrap="square">
-            <a:spAutoFit/>
-          </a:bodyPr>
-          <a:lstStyle/>
-          <a:p>
-            <a:pPr algn="l">
-              <a:defRPr sz="1100" b="1">
-                <a:solidFill>
-                  <a:srgbClr val="F59E0B"/>
-                </a:solidFill>
-                <a:latin typeface="Microsoft YaHei"/>
-              </a:defRPr>
-            </a:pPr>
-            <a:r>
-              <a:t>问：</a:t>
-            </a:r>
-          </a:p>
-        </p:txBody>
-      </p:sp>
-      <p:sp>
-        <p:nvSpPr>
-          <p:cNvPr id="28" name="TextBox 27"/>
-          <p:cNvSpPr txBox="1"/>
-          <p:nvPr/>
-        </p:nvSpPr>
-        <p:spPr>
-          <a:xfrm>
-            <a:off x="1051560" y="5715000"/>
-            <a:ext cx="3200400" cy="228600"/>
-          </a:xfrm>
-          <a:prstGeom prst="rect">
-            <a:avLst/>
-          </a:prstGeom>
-          <a:noFill/>
-        </p:spPr>
-        <p:txBody>
-          <a:bodyPr wrap="square">
-            <a:spAutoFit/>
-          </a:bodyPr>
-          <a:lstStyle/>
-          <a:p>
-            <a:pPr algn="l">
-              <a:defRPr sz="1100" b="0">
+              <a:t>  * 拖拽动态文档上传入库与 XSS 安全逃逸防护</a:t>
+            </a:r>
+          </a:p>
+        </p:txBody>
+      </p:sp>
+      <p:sp>
+        <p:nvSpPr>
+          <p:cNvPr id="27" name="Rectangle 26"/>
+          <p:cNvSpPr/>
+          <p:nvPr/>
+        </p:nvSpPr>
+        <p:spPr>
+          <a:xfrm>
+            <a:off x="6309360" y="3886200"/>
+            <a:ext cx="5303520" cy="2331720"/>
+          </a:xfrm>
+          <a:prstGeom prst="rect">
+            <a:avLst/>
+          </a:prstGeom>
+          <a:solidFill>
+            <a:srgbClr val="F8FAFC"/>
+          </a:solidFill>
+          <a:ln>
+            <a:noFill/>
+          </a:ln>
+        </p:spPr>
+        <p:style>
+          <a:lnRef idx="1">
+            <a:schemeClr val="accent1"/>
+          </a:lnRef>
+          <a:fillRef idx="3">
+            <a:schemeClr val="accent1"/>
+          </a:fillRef>
+          <a:effectRef idx="2">
+            <a:schemeClr val="accent1"/>
+          </a:effectRef>
+          <a:fontRef idx="minor">
+            <a:schemeClr val="lt1"/>
+          </a:fontRef>
+        </p:style>
+        <p:txBody>
+          <a:bodyPr rtlCol="0" anchor="ctr"/>
+          <a:lstStyle/>
+          <a:p>
+            <a:pPr algn="ctr"/>
+          </a:p>
+        </p:txBody>
+      </p:sp>
+      <p:sp>
+        <p:nvSpPr>
+          <p:cNvPr id="28" name="Rectangle 27"/>
+          <p:cNvSpPr/>
+          <p:nvPr/>
+        </p:nvSpPr>
+        <p:spPr>
+          <a:xfrm>
+            <a:off x="6327648" y="3904488"/>
+            <a:ext cx="5266944" cy="36576"/>
+          </a:xfrm>
+          <a:prstGeom prst="rect">
+            <a:avLst/>
+          </a:prstGeom>
+          <a:solidFill>
+            <a:srgbClr val="8B5CF6"/>
+          </a:solidFill>
+          <a:ln>
+            <a:noFill/>
+          </a:ln>
+        </p:spPr>
+        <p:style>
+          <a:lnRef idx="1">
+            <a:schemeClr val="accent1"/>
+          </a:lnRef>
+          <a:fillRef idx="3">
+            <a:schemeClr val="accent1"/>
+          </a:fillRef>
+          <a:effectRef idx="2">
+            <a:schemeClr val="accent1"/>
+          </a:effectRef>
+          <a:fontRef idx="minor">
+            <a:schemeClr val="lt1"/>
+          </a:fontRef>
+        </p:style>
+        <p:txBody>
+          <a:bodyPr rtlCol="0" anchor="ctr"/>
+          <a:lstStyle/>
+          <a:p>
+            <a:pPr algn="ctr"/>
+          </a:p>
+        </p:txBody>
+      </p:sp>
+      <p:sp>
+        <p:nvSpPr>
+          <p:cNvPr id="29" name="TextBox 28"/>
+          <p:cNvSpPr txBox="1"/>
+          <p:nvPr/>
+        </p:nvSpPr>
+        <p:spPr>
+          <a:xfrm>
+            <a:off x="6492240" y="4023360"/>
+            <a:ext cx="4937760" cy="274320"/>
+          </a:xfrm>
+          <a:prstGeom prst="rect">
+            <a:avLst/>
+          </a:prstGeom>
+          <a:noFill/>
+        </p:spPr>
+        <p:txBody>
+          <a:bodyPr wrap="square">
+            <a:spAutoFit/>
+          </a:bodyPr>
+          <a:lstStyle/>
+          <a:p>
+            <a:pPr algn="l">
+              <a:defRPr sz="1600" b="1">
+                <a:solidFill>
+                  <a:srgbClr val="8B5CF6"/>
+                </a:solidFill>
+                <a:latin typeface="Microsoft YaHei"/>
+              </a:defRPr>
+            </a:pPr>
+            <a:r>
+              <a:t>🧪 成员 D（测试与文档工程师）</a:t>
+            </a:r>
+          </a:p>
+        </p:txBody>
+      </p:sp>
+      <p:sp>
+        <p:nvSpPr>
+          <p:cNvPr id="30" name="TextBox 29"/>
+          <p:cNvSpPr txBox="1"/>
+          <p:nvPr/>
+        </p:nvSpPr>
+        <p:spPr>
+          <a:xfrm>
+            <a:off x="6492240" y="4389120"/>
+            <a:ext cx="4937760" cy="237744"/>
+          </a:xfrm>
+          <a:prstGeom prst="rect">
+            <a:avLst/>
+          </a:prstGeom>
+          <a:noFill/>
+        </p:spPr>
+        <p:txBody>
+          <a:bodyPr wrap="square">
+            <a:spAutoFit/>
+          </a:bodyPr>
+          <a:lstStyle/>
+          <a:p>
+            <a:pPr algn="l">
+              <a:defRPr sz="1200" b="0">
                 <a:solidFill>
                   <a:srgbClr val="1E293B"/>
                 </a:solidFill>
@@ -14518,71 +14605,35 @@
               </a:defRPr>
             </a:pPr>
             <a:r>
-              <a:t>向量数据库崩溃怎么恢复？</a:t>
-            </a:r>
-          </a:p>
-        </p:txBody>
-      </p:sp>
-      <p:sp>
-        <p:nvSpPr>
-          <p:cNvPr id="29" name="TextBox 28"/>
-          <p:cNvSpPr txBox="1"/>
-          <p:nvPr/>
-        </p:nvSpPr>
-        <p:spPr>
-          <a:xfrm>
-            <a:off x="4251960" y="5715000"/>
-            <a:ext cx="274320" cy="228600"/>
-          </a:xfrm>
-          <a:prstGeom prst="rect">
-            <a:avLst/>
-          </a:prstGeom>
-          <a:noFill/>
-        </p:spPr>
-        <p:txBody>
-          <a:bodyPr wrap="square">
-            <a:spAutoFit/>
-          </a:bodyPr>
-          <a:lstStyle/>
-          <a:p>
-            <a:pPr algn="l">
-              <a:defRPr sz="1100" b="1">
-                <a:solidFill>
-                  <a:srgbClr val="10B981"/>
-                </a:solidFill>
-                <a:latin typeface="Microsoft YaHei"/>
-              </a:defRPr>
-            </a:pPr>
-            <a:r>
-              <a:t>答：</a:t>
-            </a:r>
-          </a:p>
-        </p:txBody>
-      </p:sp>
-      <p:sp>
-        <p:nvSpPr>
-          <p:cNvPr id="30" name="TextBox 29"/>
-          <p:cNvSpPr txBox="1"/>
-          <p:nvPr/>
-        </p:nvSpPr>
-        <p:spPr>
-          <a:xfrm>
-            <a:off x="4480560" y="5715000"/>
-            <a:ext cx="6858000" cy="228600"/>
-          </a:xfrm>
-          <a:prstGeom prst="rect">
-            <a:avLst/>
-          </a:prstGeom>
-          <a:noFill/>
-        </p:spPr>
-        <p:txBody>
-          <a:bodyPr wrap="square">
-            <a:spAutoFit/>
-          </a:bodyPr>
-          <a:lstStyle/>
-          <a:p>
-            <a:pPr algn="l">
-              <a:defRPr sz="1100" b="0">
+              <a:t>  * pytest 68 个单测与集成用例覆盖开发 (100% Passed)</a:t>
+            </a:r>
+          </a:p>
+        </p:txBody>
+      </p:sp>
+      <p:sp>
+        <p:nvSpPr>
+          <p:cNvPr id="31" name="TextBox 30"/>
+          <p:cNvSpPr txBox="1"/>
+          <p:nvPr/>
+        </p:nvSpPr>
+        <p:spPr>
+          <a:xfrm>
+            <a:off x="6492240" y="4645152"/>
+            <a:ext cx="4937760" cy="237744"/>
+          </a:xfrm>
+          <a:prstGeom prst="rect">
+            <a:avLst/>
+          </a:prstGeom>
+          <a:noFill/>
+        </p:spPr>
+        <p:txBody>
+          <a:bodyPr wrap="square">
+            <a:spAutoFit/>
+          </a:bodyPr>
+          <a:lstStyle/>
+          <a:p>
+            <a:pPr algn="l">
+              <a:defRPr sz="1200" b="0">
                 <a:solidFill>
                   <a:srgbClr val="1E293B"/>
                 </a:solidFill>
@@ -14590,43 +14641,7 @@
               </a:defRPr>
             </a:pPr>
             <a:r>
-              <a:t>备份 vector_store 目录，5 分钟重建</a:t>
-            </a:r>
-          </a:p>
-        </p:txBody>
-      </p:sp>
-      <p:sp>
-        <p:nvSpPr>
-          <p:cNvPr id="31" name="TextBox 30"/>
-          <p:cNvSpPr txBox="1"/>
-          <p:nvPr/>
-        </p:nvSpPr>
-        <p:spPr>
-          <a:xfrm>
-            <a:off x="822960" y="5989320"/>
-            <a:ext cx="274320" cy="228600"/>
-          </a:xfrm>
-          <a:prstGeom prst="rect">
-            <a:avLst/>
-          </a:prstGeom>
-          <a:noFill/>
-        </p:spPr>
-        <p:txBody>
-          <a:bodyPr wrap="square">
-            <a:spAutoFit/>
-          </a:bodyPr>
-          <a:lstStyle/>
-          <a:p>
-            <a:pPr algn="l">
-              <a:defRPr sz="1100" b="1">
-                <a:solidFill>
-                  <a:srgbClr val="F59E0B"/>
-                </a:solidFill>
-                <a:latin typeface="Microsoft YaHei"/>
-              </a:defRPr>
-            </a:pPr>
-            <a:r>
-              <a:t>问：</a:t>
+              <a:t>  * unittest.mock.patch 离线环境深度解耦</a:t>
             </a:r>
           </a:p>
         </p:txBody>
@@ -14639,22 +14654,22 @@
         </p:nvSpPr>
         <p:spPr>
           <a:xfrm>
-            <a:off x="1051560" y="5989320"/>
-            <a:ext cx="3200400" cy="228600"/>
-          </a:xfrm>
-          <a:prstGeom prst="rect">
-            <a:avLst/>
-          </a:prstGeom>
-          <a:noFill/>
-        </p:spPr>
-        <p:txBody>
-          <a:bodyPr wrap="square">
-            <a:spAutoFit/>
-          </a:bodyPr>
-          <a:lstStyle/>
-          <a:p>
-            <a:pPr algn="l">
-              <a:defRPr sz="1100" b="0">
+            <a:off x="6492240" y="4901184"/>
+            <a:ext cx="4937760" cy="237744"/>
+          </a:xfrm>
+          <a:prstGeom prst="rect">
+            <a:avLst/>
+          </a:prstGeom>
+          <a:noFill/>
+        </p:spPr>
+        <p:txBody>
+          <a:bodyPr wrap="square">
+            <a:spAutoFit/>
+          </a:bodyPr>
+          <a:lstStyle/>
+          <a:p>
+            <a:pPr algn="l">
+              <a:defRPr sz="1200" b="0">
                 <a:solidFill>
                   <a:srgbClr val="1E293B"/>
                 </a:solidFill>
@@ -14662,7 +14677,7 @@
               </a:defRPr>
             </a:pPr>
             <a:r>
-              <a:t>为什么选 ChromaDB 不是 Milvus？</a:t>
+              <a:t>  * 嵌套 YAML、网络中断、系统信号防吞极限边界测试</a:t>
             </a:r>
           </a:p>
         </p:txBody>
@@ -14675,58 +14690,22 @@
         </p:nvSpPr>
         <p:spPr>
           <a:xfrm>
-            <a:off x="4251960" y="5989320"/>
-            <a:ext cx="274320" cy="228600"/>
-          </a:xfrm>
-          <a:prstGeom prst="rect">
-            <a:avLst/>
-          </a:prstGeom>
-          <a:noFill/>
-        </p:spPr>
-        <p:txBody>
-          <a:bodyPr wrap="square">
-            <a:spAutoFit/>
-          </a:bodyPr>
-          <a:lstStyle/>
-          <a:p>
-            <a:pPr algn="l">
-              <a:defRPr sz="1100" b="1">
-                <a:solidFill>
-                  <a:srgbClr val="10B981"/>
-                </a:solidFill>
-                <a:latin typeface="Microsoft YaHei"/>
-              </a:defRPr>
-            </a:pPr>
-            <a:r>
-              <a:t>答：</a:t>
-            </a:r>
-          </a:p>
-        </p:txBody>
-      </p:sp>
-      <p:sp>
-        <p:nvSpPr>
-          <p:cNvPr id="34" name="TextBox 33"/>
-          <p:cNvSpPr txBox="1"/>
-          <p:nvPr/>
-        </p:nvSpPr>
-        <p:spPr>
-          <a:xfrm>
-            <a:off x="4480560" y="5989320"/>
-            <a:ext cx="6858000" cy="228600"/>
-          </a:xfrm>
-          <a:prstGeom prst="rect">
-            <a:avLst/>
-          </a:prstGeom>
-          <a:noFill/>
-        </p:spPr>
-        <p:txBody>
-          <a:bodyPr wrap="square">
-            <a:spAutoFit/>
-          </a:bodyPr>
-          <a:lstStyle/>
-          <a:p>
-            <a:pPr algn="l">
-              <a:defRPr sz="1100" b="0">
+            <a:off x="6492240" y="5157216"/>
+            <a:ext cx="4937760" cy="237744"/>
+          </a:xfrm>
+          <a:prstGeom prst="rect">
+            <a:avLst/>
+          </a:prstGeom>
+          <a:noFill/>
+        </p:spPr>
+        <p:txBody>
+          <a:bodyPr wrap="square">
+            <a:spAutoFit/>
+          </a:bodyPr>
+          <a:lstStyle/>
+          <a:p>
+            <a:pPr algn="l">
+              <a:defRPr sz="1200" b="0">
                 <a:solidFill>
                   <a:srgbClr val="1E293B"/>
                 </a:solidFill>
@@ -14734,151 +14713,7 @@
               </a:defRPr>
             </a:pPr>
             <a:r>
-              <a:t>零部署，教育场景够用；做了抽象封装可迁移</a:t>
-            </a:r>
-          </a:p>
-        </p:txBody>
-      </p:sp>
-      <p:sp>
-        <p:nvSpPr>
-          <p:cNvPr id="35" name="TextBox 34"/>
-          <p:cNvSpPr txBox="1"/>
-          <p:nvPr/>
-        </p:nvSpPr>
-        <p:spPr>
-          <a:xfrm>
-            <a:off x="822960" y="6263640"/>
-            <a:ext cx="274320" cy="228600"/>
-          </a:xfrm>
-          <a:prstGeom prst="rect">
-            <a:avLst/>
-          </a:prstGeom>
-          <a:noFill/>
-        </p:spPr>
-        <p:txBody>
-          <a:bodyPr wrap="square">
-            <a:spAutoFit/>
-          </a:bodyPr>
-          <a:lstStyle/>
-          <a:p>
-            <a:pPr algn="l">
-              <a:defRPr sz="1100" b="1">
-                <a:solidFill>
-                  <a:srgbClr val="F59E0B"/>
-                </a:solidFill>
-                <a:latin typeface="Microsoft YaHei"/>
-              </a:defRPr>
-            </a:pPr>
-            <a:r>
-              <a:t>问：</a:t>
-            </a:r>
-          </a:p>
-        </p:txBody>
-      </p:sp>
-      <p:sp>
-        <p:nvSpPr>
-          <p:cNvPr id="36" name="TextBox 35"/>
-          <p:cNvSpPr txBox="1"/>
-          <p:nvPr/>
-        </p:nvSpPr>
-        <p:spPr>
-          <a:xfrm>
-            <a:off x="1051560" y="6263640"/>
-            <a:ext cx="3200400" cy="228600"/>
-          </a:xfrm>
-          <a:prstGeom prst="rect">
-            <a:avLst/>
-          </a:prstGeom>
-          <a:noFill/>
-        </p:spPr>
-        <p:txBody>
-          <a:bodyPr wrap="square">
-            <a:spAutoFit/>
-          </a:bodyPr>
-          <a:lstStyle/>
-          <a:p>
-            <a:pPr algn="l">
-              <a:defRPr sz="1100" b="0">
-                <a:solidFill>
-                  <a:srgbClr val="1E293B"/>
-                </a:solidFill>
-                <a:latin typeface="Microsoft YaHei"/>
-              </a:defRPr>
-            </a:pPr>
-            <a:r>
-              <a:t>1000 篇文档怎么增量更新？</a:t>
-            </a:r>
-          </a:p>
-        </p:txBody>
-      </p:sp>
-      <p:sp>
-        <p:nvSpPr>
-          <p:cNvPr id="37" name="TextBox 36"/>
-          <p:cNvSpPr txBox="1"/>
-          <p:nvPr/>
-        </p:nvSpPr>
-        <p:spPr>
-          <a:xfrm>
-            <a:off x="4251960" y="6263640"/>
-            <a:ext cx="274320" cy="228600"/>
-          </a:xfrm>
-          <a:prstGeom prst="rect">
-            <a:avLst/>
-          </a:prstGeom>
-          <a:noFill/>
-        </p:spPr>
-        <p:txBody>
-          <a:bodyPr wrap="square">
-            <a:spAutoFit/>
-          </a:bodyPr>
-          <a:lstStyle/>
-          <a:p>
-            <a:pPr algn="l">
-              <a:defRPr sz="1100" b="1">
-                <a:solidFill>
-                  <a:srgbClr val="10B981"/>
-                </a:solidFill>
-                <a:latin typeface="Microsoft YaHei"/>
-              </a:defRPr>
-            </a:pPr>
-            <a:r>
-              <a:t>答：</a:t>
-            </a:r>
-          </a:p>
-        </p:txBody>
-      </p:sp>
-      <p:sp>
-        <p:nvSpPr>
-          <p:cNvPr id="38" name="TextBox 37"/>
-          <p:cNvSpPr txBox="1"/>
-          <p:nvPr/>
-        </p:nvSpPr>
-        <p:spPr>
-          <a:xfrm>
-            <a:off x="4480560" y="6263640"/>
-            <a:ext cx="6858000" cy="228600"/>
-          </a:xfrm>
-          <a:prstGeom prst="rect">
-            <a:avLst/>
-          </a:prstGeom>
-          <a:noFill/>
-        </p:spPr>
-        <p:txBody>
-          <a:bodyPr wrap="square">
-            <a:spAutoFit/>
-          </a:bodyPr>
-          <a:lstStyle/>
-          <a:p>
-            <a:pPr algn="l">
-              <a:defRPr sz="1100" b="0">
-                <a:solidFill>
-                  <a:srgbClr val="1E293B"/>
-                </a:solidFill>
-                <a:latin typeface="Microsoft YaHei"/>
-              </a:defRPr>
-            </a:pPr>
-            <a:r>
-              <a:t>当前 upsert 去重，后续可做增量索引</a:t>
+              <a:t>  * report.md/README.md/演示 PPT 文稿高标准撰写</a:t>
             </a:r>
           </a:p>
         </p:txBody>
@@ -14892,6 +14727,1420 @@
 </file>
 
 <file path=ppt/slides/slide18.xml><?xml version="1.0" encoding="utf-8"?>
+<p:sld xmlns:a="http://schemas.openxmlformats.org/drawingml/2006/main" xmlns:p="http://schemas.openxmlformats.org/presentationml/2006/main" xmlns:r="http://schemas.openxmlformats.org/officeDocument/2006/relationships">
+  <p:cSld>
+    <p:bg>
+      <p:bgPr>
+        <a:solidFill>
+          <a:srgbClr val="FFFFFF"/>
+        </a:solidFill>
+        <a:effectLst/>
+      </p:bgPr>
+    </p:bg>
+    <p:spTree>
+      <p:nvGrpSpPr>
+        <p:cNvPr id="1" name=""/>
+        <p:cNvGrpSpPr/>
+        <p:nvPr/>
+      </p:nvGrpSpPr>
+      <p:grpSpPr/>
+      <p:sp>
+        <p:nvSpPr>
+          <p:cNvPr id="2" name="Rectangle 1"/>
+          <p:cNvSpPr/>
+          <p:nvPr/>
+        </p:nvSpPr>
+        <p:spPr>
+          <a:xfrm>
+            <a:off x="0" y="0"/>
+            <a:ext cx="12191695" cy="914400"/>
+          </a:xfrm>
+          <a:prstGeom prst="rect">
+            <a:avLst/>
+          </a:prstGeom>
+          <a:solidFill>
+            <a:srgbClr val="0D233F"/>
+          </a:solidFill>
+          <a:ln>
+            <a:noFill/>
+          </a:ln>
+        </p:spPr>
+        <p:style>
+          <a:lnRef idx="1">
+            <a:schemeClr val="accent1"/>
+          </a:lnRef>
+          <a:fillRef idx="3">
+            <a:schemeClr val="accent1"/>
+          </a:fillRef>
+          <a:effectRef idx="2">
+            <a:schemeClr val="accent1"/>
+          </a:effectRef>
+          <a:fontRef idx="minor">
+            <a:schemeClr val="lt1"/>
+          </a:fontRef>
+        </p:style>
+        <p:txBody>
+          <a:bodyPr rtlCol="0" anchor="ctr"/>
+          <a:lstStyle/>
+          <a:p>
+            <a:pPr algn="ctr"/>
+          </a:p>
+        </p:txBody>
+      </p:sp>
+      <p:sp>
+        <p:nvSpPr>
+          <p:cNvPr id="3" name="Rectangle 2"/>
+          <p:cNvSpPr/>
+          <p:nvPr/>
+        </p:nvSpPr>
+        <p:spPr>
+          <a:xfrm>
+            <a:off x="0" y="868680"/>
+            <a:ext cx="12191695" cy="45720"/>
+          </a:xfrm>
+          <a:prstGeom prst="rect">
+            <a:avLst/>
+          </a:prstGeom>
+          <a:solidFill>
+            <a:srgbClr val="06D6A0"/>
+          </a:solidFill>
+          <a:ln>
+            <a:noFill/>
+          </a:ln>
+        </p:spPr>
+        <p:style>
+          <a:lnRef idx="1">
+            <a:schemeClr val="accent1"/>
+          </a:lnRef>
+          <a:fillRef idx="3">
+            <a:schemeClr val="accent1"/>
+          </a:fillRef>
+          <a:effectRef idx="2">
+            <a:schemeClr val="accent1"/>
+          </a:effectRef>
+          <a:fontRef idx="minor">
+            <a:schemeClr val="lt1"/>
+          </a:fontRef>
+        </p:style>
+        <p:txBody>
+          <a:bodyPr rtlCol="0" anchor="ctr"/>
+          <a:lstStyle/>
+          <a:p>
+            <a:pPr algn="ctr"/>
+          </a:p>
+        </p:txBody>
+      </p:sp>
+      <p:sp>
+        <p:nvSpPr>
+          <p:cNvPr id="4" name="TextBox 3"/>
+          <p:cNvSpPr txBox="1"/>
+          <p:nvPr/>
+        </p:nvSpPr>
+        <p:spPr>
+          <a:xfrm>
+            <a:off x="548640" y="109728"/>
+            <a:ext cx="9144000" cy="457200"/>
+          </a:xfrm>
+          <a:prstGeom prst="rect">
+            <a:avLst/>
+          </a:prstGeom>
+          <a:noFill/>
+        </p:spPr>
+        <p:txBody>
+          <a:bodyPr wrap="square">
+            <a:spAutoFit/>
+          </a:bodyPr>
+          <a:lstStyle/>
+          <a:p>
+            <a:pPr algn="l">
+              <a:defRPr sz="2600" b="1">
+                <a:solidFill>
+                  <a:srgbClr val="FFFFFF"/>
+                </a:solidFill>
+                <a:latin typeface="Microsoft YaHei"/>
+              </a:defRPr>
+            </a:pPr>
+            <a:r>
+              <a:t>十、演示方案与答辩准备</a:t>
+            </a:r>
+          </a:p>
+        </p:txBody>
+      </p:sp>
+      <p:sp>
+        <p:nvSpPr>
+          <p:cNvPr id="5" name="Rectangle 4"/>
+          <p:cNvSpPr/>
+          <p:nvPr/>
+        </p:nvSpPr>
+        <p:spPr>
+          <a:xfrm>
+            <a:off x="548640" y="1371600"/>
+            <a:ext cx="5303520" cy="3840480"/>
+          </a:xfrm>
+          <a:prstGeom prst="rect">
+            <a:avLst/>
+          </a:prstGeom>
+          <a:solidFill>
+            <a:srgbClr val="F8FAFC"/>
+          </a:solidFill>
+          <a:ln>
+            <a:noFill/>
+          </a:ln>
+        </p:spPr>
+        <p:style>
+          <a:lnRef idx="1">
+            <a:schemeClr val="accent1"/>
+          </a:lnRef>
+          <a:fillRef idx="3">
+            <a:schemeClr val="accent1"/>
+          </a:fillRef>
+          <a:effectRef idx="2">
+            <a:schemeClr val="accent1"/>
+          </a:effectRef>
+          <a:fontRef idx="minor">
+            <a:schemeClr val="lt1"/>
+          </a:fontRef>
+        </p:style>
+        <p:txBody>
+          <a:bodyPr rtlCol="0" anchor="ctr"/>
+          <a:lstStyle/>
+          <a:p>
+            <a:pPr algn="ctr"/>
+          </a:p>
+        </p:txBody>
+      </p:sp>
+      <p:sp>
+        <p:nvSpPr>
+          <p:cNvPr id="6" name="Rectangle 5"/>
+          <p:cNvSpPr/>
+          <p:nvPr/>
+        </p:nvSpPr>
+        <p:spPr>
+          <a:xfrm>
+            <a:off x="566928" y="1389888"/>
+            <a:ext cx="5266944" cy="36576"/>
+          </a:xfrm>
+          <a:prstGeom prst="rect">
+            <a:avLst/>
+          </a:prstGeom>
+          <a:solidFill>
+            <a:srgbClr val="1A56DB"/>
+          </a:solidFill>
+          <a:ln>
+            <a:noFill/>
+          </a:ln>
+        </p:spPr>
+        <p:style>
+          <a:lnRef idx="1">
+            <a:schemeClr val="accent1"/>
+          </a:lnRef>
+          <a:fillRef idx="3">
+            <a:schemeClr val="accent1"/>
+          </a:fillRef>
+          <a:effectRef idx="2">
+            <a:schemeClr val="accent1"/>
+          </a:effectRef>
+          <a:fontRef idx="minor">
+            <a:schemeClr val="lt1"/>
+          </a:fontRef>
+        </p:style>
+        <p:txBody>
+          <a:bodyPr rtlCol="0" anchor="ctr"/>
+          <a:lstStyle/>
+          <a:p>
+            <a:pPr algn="ctr"/>
+          </a:p>
+        </p:txBody>
+      </p:sp>
+      <p:sp>
+        <p:nvSpPr>
+          <p:cNvPr id="7" name="TextBox 6"/>
+          <p:cNvSpPr txBox="1"/>
+          <p:nvPr/>
+        </p:nvSpPr>
+        <p:spPr>
+          <a:xfrm>
+            <a:off x="731520" y="1508760"/>
+            <a:ext cx="4937760" cy="274320"/>
+          </a:xfrm>
+          <a:prstGeom prst="rect">
+            <a:avLst/>
+          </a:prstGeom>
+          <a:noFill/>
+        </p:spPr>
+        <p:txBody>
+          <a:bodyPr wrap="square">
+            <a:spAutoFit/>
+          </a:bodyPr>
+          <a:lstStyle/>
+          <a:p>
+            <a:pPr algn="l">
+              <a:defRPr sz="1600" b="1">
+                <a:solidFill>
+                  <a:srgbClr val="1A56DB"/>
+                </a:solidFill>
+                <a:latin typeface="Microsoft YaHei"/>
+              </a:defRPr>
+            </a:pPr>
+            <a:r>
+              <a:t>CLI 演示（3 分钟）</a:t>
+            </a:r>
+          </a:p>
+        </p:txBody>
+      </p:sp>
+      <p:sp>
+        <p:nvSpPr>
+          <p:cNvPr id="8" name="TextBox 7"/>
+          <p:cNvSpPr txBox="1"/>
+          <p:nvPr/>
+        </p:nvSpPr>
+        <p:spPr>
+          <a:xfrm>
+            <a:off x="731520" y="1874520"/>
+            <a:ext cx="4937760" cy="237744"/>
+          </a:xfrm>
+          <a:prstGeom prst="rect">
+            <a:avLst/>
+          </a:prstGeom>
+          <a:noFill/>
+        </p:spPr>
+        <p:txBody>
+          <a:bodyPr wrap="square">
+            <a:spAutoFit/>
+          </a:bodyPr>
+          <a:lstStyle/>
+          <a:p>
+            <a:pPr algn="l">
+              <a:defRPr sz="1200" b="0">
+                <a:solidFill>
+                  <a:srgbClr val="1E293B"/>
+                </a:solidFill>
+                <a:latin typeface="Microsoft YaHei"/>
+              </a:defRPr>
+            </a:pPr>
+            <a:r>
+              <a:t>  * 知识库问答：查询提交截止日期</a:t>
+            </a:r>
+          </a:p>
+        </p:txBody>
+      </p:sp>
+      <p:sp>
+        <p:nvSpPr>
+          <p:cNvPr id="9" name="TextBox 8"/>
+          <p:cNvSpPr txBox="1"/>
+          <p:nvPr/>
+        </p:nvSpPr>
+        <p:spPr>
+          <a:xfrm>
+            <a:off x="731520" y="2130552"/>
+            <a:ext cx="4937760" cy="237744"/>
+          </a:xfrm>
+          <a:prstGeom prst="rect">
+            <a:avLst/>
+          </a:prstGeom>
+          <a:noFill/>
+        </p:spPr>
+        <p:txBody>
+          <a:bodyPr wrap="square">
+            <a:spAutoFit/>
+          </a:bodyPr>
+          <a:lstStyle/>
+          <a:p>
+            <a:pPr algn="l">
+              <a:defRPr sz="1200" b="0">
+                <a:solidFill>
+                  <a:srgbClr val="1E293B"/>
+                </a:solidFill>
+                <a:latin typeface="Microsoft YaHei"/>
+              </a:defRPr>
+            </a:pPr>
+            <a:r>
+              <a:t>  * 跨文档综合：什么是 RAG</a:t>
+            </a:r>
+          </a:p>
+        </p:txBody>
+      </p:sp>
+      <p:sp>
+        <p:nvSpPr>
+          <p:cNvPr id="10" name="TextBox 9"/>
+          <p:cNvSpPr txBox="1"/>
+          <p:nvPr/>
+        </p:nvSpPr>
+        <p:spPr>
+          <a:xfrm>
+            <a:off x="731520" y="2386584"/>
+            <a:ext cx="4937760" cy="237744"/>
+          </a:xfrm>
+          <a:prstGeom prst="rect">
+            <a:avLst/>
+          </a:prstGeom>
+          <a:noFill/>
+        </p:spPr>
+        <p:txBody>
+          <a:bodyPr wrap="square">
+            <a:spAutoFit/>
+          </a:bodyPr>
+          <a:lstStyle/>
+          <a:p>
+            <a:pPr algn="l">
+              <a:defRPr sz="1200" b="0">
+                <a:solidFill>
+                  <a:srgbClr val="1E293B"/>
+                </a:solidFill>
+                <a:latin typeface="Microsoft YaHei"/>
+              </a:defRPr>
+            </a:pPr>
+            <a:r>
+              <a:t>  * 拒答演示：查询无关问题</a:t>
+            </a:r>
+          </a:p>
+        </p:txBody>
+      </p:sp>
+      <p:sp>
+        <p:nvSpPr>
+          <p:cNvPr id="11" name="TextBox 10"/>
+          <p:cNvSpPr txBox="1"/>
+          <p:nvPr/>
+        </p:nvSpPr>
+        <p:spPr>
+          <a:xfrm>
+            <a:off x="731520" y="2642616"/>
+            <a:ext cx="4937760" cy="237744"/>
+          </a:xfrm>
+          <a:prstGeom prst="rect">
+            <a:avLst/>
+          </a:prstGeom>
+          <a:noFill/>
+        </p:spPr>
+        <p:txBody>
+          <a:bodyPr wrap="square">
+            <a:spAutoFit/>
+          </a:bodyPr>
+          <a:lstStyle/>
+          <a:p>
+            <a:pPr algn="l">
+              <a:defRPr sz="1200" b="0">
+                <a:solidFill>
+                  <a:srgbClr val="1E293B"/>
+                </a:solidFill>
+                <a:latin typeface="Microsoft YaHei"/>
+              </a:defRPr>
+            </a:pPr>
+            <a:r>
+              <a:t>  * 展示查询解析过程</a:t>
+            </a:r>
+          </a:p>
+        </p:txBody>
+      </p:sp>
+      <p:sp>
+        <p:nvSpPr>
+          <p:cNvPr id="12" name="Rectangle 11"/>
+          <p:cNvSpPr/>
+          <p:nvPr/>
+        </p:nvSpPr>
+        <p:spPr>
+          <a:xfrm>
+            <a:off x="6309360" y="1371600"/>
+            <a:ext cx="5303520" cy="3840480"/>
+          </a:xfrm>
+          <a:prstGeom prst="rect">
+            <a:avLst/>
+          </a:prstGeom>
+          <a:solidFill>
+            <a:srgbClr val="F8FAFC"/>
+          </a:solidFill>
+          <a:ln>
+            <a:noFill/>
+          </a:ln>
+        </p:spPr>
+        <p:style>
+          <a:lnRef idx="1">
+            <a:schemeClr val="accent1"/>
+          </a:lnRef>
+          <a:fillRef idx="3">
+            <a:schemeClr val="accent1"/>
+          </a:fillRef>
+          <a:effectRef idx="2">
+            <a:schemeClr val="accent1"/>
+          </a:effectRef>
+          <a:fontRef idx="minor">
+            <a:schemeClr val="lt1"/>
+          </a:fontRef>
+        </p:style>
+        <p:txBody>
+          <a:bodyPr rtlCol="0" anchor="ctr"/>
+          <a:lstStyle/>
+          <a:p>
+            <a:pPr algn="ctr"/>
+          </a:p>
+        </p:txBody>
+      </p:sp>
+      <p:sp>
+        <p:nvSpPr>
+          <p:cNvPr id="13" name="Rectangle 12"/>
+          <p:cNvSpPr/>
+          <p:nvPr/>
+        </p:nvSpPr>
+        <p:spPr>
+          <a:xfrm>
+            <a:off x="6327648" y="1389888"/>
+            <a:ext cx="5266944" cy="36576"/>
+          </a:xfrm>
+          <a:prstGeom prst="rect">
+            <a:avLst/>
+          </a:prstGeom>
+          <a:solidFill>
+            <a:srgbClr val="148A8A"/>
+          </a:solidFill>
+          <a:ln>
+            <a:noFill/>
+          </a:ln>
+        </p:spPr>
+        <p:style>
+          <a:lnRef idx="1">
+            <a:schemeClr val="accent1"/>
+          </a:lnRef>
+          <a:fillRef idx="3">
+            <a:schemeClr val="accent1"/>
+          </a:fillRef>
+          <a:effectRef idx="2">
+            <a:schemeClr val="accent1"/>
+          </a:effectRef>
+          <a:fontRef idx="minor">
+            <a:schemeClr val="lt1"/>
+          </a:fontRef>
+        </p:style>
+        <p:txBody>
+          <a:bodyPr rtlCol="0" anchor="ctr"/>
+          <a:lstStyle/>
+          <a:p>
+            <a:pPr algn="ctr"/>
+          </a:p>
+        </p:txBody>
+      </p:sp>
+      <p:sp>
+        <p:nvSpPr>
+          <p:cNvPr id="14" name="TextBox 13"/>
+          <p:cNvSpPr txBox="1"/>
+          <p:nvPr/>
+        </p:nvSpPr>
+        <p:spPr>
+          <a:xfrm>
+            <a:off x="6492240" y="1508760"/>
+            <a:ext cx="4937760" cy="274320"/>
+          </a:xfrm>
+          <a:prstGeom prst="rect">
+            <a:avLst/>
+          </a:prstGeom>
+          <a:noFill/>
+        </p:spPr>
+        <p:txBody>
+          <a:bodyPr wrap="square">
+            <a:spAutoFit/>
+          </a:bodyPr>
+          <a:lstStyle/>
+          <a:p>
+            <a:pPr algn="l">
+              <a:defRPr sz="1600" b="1">
+                <a:solidFill>
+                  <a:srgbClr val="148A8A"/>
+                </a:solidFill>
+                <a:latin typeface="Microsoft YaHei"/>
+              </a:defRPr>
+            </a:pPr>
+            <a:r>
+              <a:t>Streamlit 演示（5 分钟）</a:t>
+            </a:r>
+          </a:p>
+        </p:txBody>
+      </p:sp>
+      <p:sp>
+        <p:nvSpPr>
+          <p:cNvPr id="15" name="TextBox 14"/>
+          <p:cNvSpPr txBox="1"/>
+          <p:nvPr/>
+        </p:nvSpPr>
+        <p:spPr>
+          <a:xfrm>
+            <a:off x="6492240" y="1874520"/>
+            <a:ext cx="4937760" cy="237744"/>
+          </a:xfrm>
+          <a:prstGeom prst="rect">
+            <a:avLst/>
+          </a:prstGeom>
+          <a:noFill/>
+        </p:spPr>
+        <p:txBody>
+          <a:bodyPr wrap="square">
+            <a:spAutoFit/>
+          </a:bodyPr>
+          <a:lstStyle/>
+          <a:p>
+            <a:pPr algn="l">
+              <a:defRPr sz="1200" b="0">
+                <a:solidFill>
+                  <a:srgbClr val="1E293B"/>
+                </a:solidFill>
+                <a:latin typeface="Microsoft YaHei"/>
+              </a:defRPr>
+            </a:pPr>
+            <a:r>
+              <a:t>  * 侧边栏展示文档块数和来源</a:t>
+            </a:r>
+          </a:p>
+        </p:txBody>
+      </p:sp>
+      <p:sp>
+        <p:nvSpPr>
+          <p:cNvPr id="16" name="TextBox 15"/>
+          <p:cNvSpPr txBox="1"/>
+          <p:nvPr/>
+        </p:nvSpPr>
+        <p:spPr>
+          <a:xfrm>
+            <a:off x="6492240" y="2130552"/>
+            <a:ext cx="4937760" cy="237744"/>
+          </a:xfrm>
+          <a:prstGeom prst="rect">
+            <a:avLst/>
+          </a:prstGeom>
+          <a:noFill/>
+        </p:spPr>
+        <p:txBody>
+          <a:bodyPr wrap="square">
+            <a:spAutoFit/>
+          </a:bodyPr>
+          <a:lstStyle/>
+          <a:p>
+            <a:pPr algn="l">
+              <a:defRPr sz="1200" b="0">
+                <a:solidFill>
+                  <a:srgbClr val="1E293B"/>
+                </a:solidFill>
+                <a:latin typeface="Microsoft YaHei"/>
+              </a:defRPr>
+            </a:pPr>
+            <a:r>
+              <a:t>  * 连续提问展示对话历史</a:t>
+            </a:r>
+          </a:p>
+        </p:txBody>
+      </p:sp>
+      <p:sp>
+        <p:nvSpPr>
+          <p:cNvPr id="17" name="TextBox 16"/>
+          <p:cNvSpPr txBox="1"/>
+          <p:nvPr/>
+        </p:nvSpPr>
+        <p:spPr>
+          <a:xfrm>
+            <a:off x="6492240" y="2386584"/>
+            <a:ext cx="4937760" cy="237744"/>
+          </a:xfrm>
+          <a:prstGeom prst="rect">
+            <a:avLst/>
+          </a:prstGeom>
+          <a:noFill/>
+        </p:spPr>
+        <p:txBody>
+          <a:bodyPr wrap="square">
+            <a:spAutoFit/>
+          </a:bodyPr>
+          <a:lstStyle/>
+          <a:p>
+            <a:pPr algn="l">
+              <a:defRPr sz="1200" b="0">
+                <a:solidFill>
+                  <a:srgbClr val="1E293B"/>
+                </a:solidFill>
+                <a:latin typeface="Microsoft YaHei"/>
+              </a:defRPr>
+            </a:pPr>
+            <a:r>
+              <a:t>  * 调试模式展示搜索词和过滤条件</a:t>
+            </a:r>
+          </a:p>
+        </p:txBody>
+      </p:sp>
+      <p:sp>
+        <p:nvSpPr>
+          <p:cNvPr id="18" name="TextBox 17"/>
+          <p:cNvSpPr txBox="1"/>
+          <p:nvPr/>
+        </p:nvSpPr>
+        <p:spPr>
+          <a:xfrm>
+            <a:off x="6492240" y="2642616"/>
+            <a:ext cx="4937760" cy="237744"/>
+          </a:xfrm>
+          <a:prstGeom prst="rect">
+            <a:avLst/>
+          </a:prstGeom>
+          <a:noFill/>
+        </p:spPr>
+        <p:txBody>
+          <a:bodyPr wrap="square">
+            <a:spAutoFit/>
+          </a:bodyPr>
+          <a:lstStyle/>
+          <a:p>
+            <a:pPr algn="l">
+              <a:defRPr sz="1200" b="0">
+                <a:solidFill>
+                  <a:srgbClr val="1E293B"/>
+                </a:solidFill>
+                <a:latin typeface="Microsoft YaHei"/>
+              </a:defRPr>
+            </a:pPr>
+            <a:r>
+              <a:t>  * 调节 Top-K 和最大距离阈值</a:t>
+            </a:r>
+          </a:p>
+        </p:txBody>
+      </p:sp>
+      <p:sp>
+        <p:nvSpPr>
+          <p:cNvPr id="19" name="TextBox 18"/>
+          <p:cNvSpPr txBox="1"/>
+          <p:nvPr/>
+        </p:nvSpPr>
+        <p:spPr>
+          <a:xfrm>
+            <a:off x="6492240" y="2898648"/>
+            <a:ext cx="4937760" cy="237744"/>
+          </a:xfrm>
+          <a:prstGeom prst="rect">
+            <a:avLst/>
+          </a:prstGeom>
+          <a:noFill/>
+        </p:spPr>
+        <p:txBody>
+          <a:bodyPr wrap="square">
+            <a:spAutoFit/>
+          </a:bodyPr>
+          <a:lstStyle/>
+          <a:p>
+            <a:pPr algn="l">
+              <a:defRPr sz="1200" b="0">
+                <a:solidFill>
+                  <a:srgbClr val="1E293B"/>
+                </a:solidFill>
+                <a:latin typeface="Microsoft YaHei"/>
+              </a:defRPr>
+            </a:pPr>
+            <a:r>
+              <a:t>  * 展开检索来源查看分数</a:t>
+            </a:r>
+          </a:p>
+        </p:txBody>
+      </p:sp>
+      <p:sp>
+        <p:nvSpPr>
+          <p:cNvPr id="20" name="Rectangle 19"/>
+          <p:cNvSpPr/>
+          <p:nvPr/>
+        </p:nvSpPr>
+        <p:spPr>
+          <a:xfrm>
+            <a:off x="548640" y="5029200"/>
+            <a:ext cx="11064240" cy="1371600"/>
+          </a:xfrm>
+          <a:prstGeom prst="rect">
+            <a:avLst/>
+          </a:prstGeom>
+          <a:solidFill>
+            <a:srgbClr val="F8FAFC"/>
+          </a:solidFill>
+          <a:ln>
+            <a:noFill/>
+          </a:ln>
+        </p:spPr>
+        <p:style>
+          <a:lnRef idx="1">
+            <a:schemeClr val="accent1"/>
+          </a:lnRef>
+          <a:fillRef idx="3">
+            <a:schemeClr val="accent1"/>
+          </a:fillRef>
+          <a:effectRef idx="2">
+            <a:schemeClr val="accent1"/>
+          </a:effectRef>
+          <a:fontRef idx="minor">
+            <a:schemeClr val="lt1"/>
+          </a:fontRef>
+        </p:style>
+        <p:txBody>
+          <a:bodyPr rtlCol="0" anchor="ctr"/>
+          <a:lstStyle/>
+          <a:p>
+            <a:pPr algn="ctr"/>
+          </a:p>
+        </p:txBody>
+      </p:sp>
+      <p:sp>
+        <p:nvSpPr>
+          <p:cNvPr id="21" name="Rectangle 20"/>
+          <p:cNvSpPr/>
+          <p:nvPr/>
+        </p:nvSpPr>
+        <p:spPr>
+          <a:xfrm>
+            <a:off x="548640" y="5029200"/>
+            <a:ext cx="54864" cy="1371600"/>
+          </a:xfrm>
+          <a:prstGeom prst="rect">
+            <a:avLst/>
+          </a:prstGeom>
+          <a:solidFill>
+            <a:srgbClr val="0D233F"/>
+          </a:solidFill>
+          <a:ln>
+            <a:noFill/>
+          </a:ln>
+        </p:spPr>
+        <p:style>
+          <a:lnRef idx="1">
+            <a:schemeClr val="accent1"/>
+          </a:lnRef>
+          <a:fillRef idx="3">
+            <a:schemeClr val="accent1"/>
+          </a:fillRef>
+          <a:effectRef idx="2">
+            <a:schemeClr val="accent1"/>
+          </a:effectRef>
+          <a:fontRef idx="minor">
+            <a:schemeClr val="lt1"/>
+          </a:fontRef>
+        </p:style>
+        <p:txBody>
+          <a:bodyPr rtlCol="0" anchor="ctr"/>
+          <a:lstStyle/>
+          <a:p>
+            <a:pPr algn="ctr"/>
+          </a:p>
+        </p:txBody>
+      </p:sp>
+      <p:sp>
+        <p:nvSpPr>
+          <p:cNvPr id="22" name="TextBox 21"/>
+          <p:cNvSpPr txBox="1"/>
+          <p:nvPr/>
+        </p:nvSpPr>
+        <p:spPr>
+          <a:xfrm>
+            <a:off x="822960" y="5120640"/>
+            <a:ext cx="10515600" cy="274320"/>
+          </a:xfrm>
+          <a:prstGeom prst="rect">
+            <a:avLst/>
+          </a:prstGeom>
+          <a:noFill/>
+        </p:spPr>
+        <p:txBody>
+          <a:bodyPr wrap="square">
+            <a:spAutoFit/>
+          </a:bodyPr>
+          <a:lstStyle/>
+          <a:p>
+            <a:pPr algn="l">
+              <a:defRPr sz="1600" b="1">
+                <a:solidFill>
+                  <a:srgbClr val="0D233F"/>
+                </a:solidFill>
+                <a:latin typeface="Microsoft YaHei"/>
+              </a:defRPr>
+            </a:pPr>
+            <a:r>
+              <a:t>答辩 Q&amp;A 准备</a:t>
+            </a:r>
+          </a:p>
+        </p:txBody>
+      </p:sp>
+      <p:sp>
+        <p:nvSpPr>
+          <p:cNvPr id="23" name="TextBox 22"/>
+          <p:cNvSpPr txBox="1"/>
+          <p:nvPr/>
+        </p:nvSpPr>
+        <p:spPr>
+          <a:xfrm>
+            <a:off x="822960" y="5440680"/>
+            <a:ext cx="274320" cy="228600"/>
+          </a:xfrm>
+          <a:prstGeom prst="rect">
+            <a:avLst/>
+          </a:prstGeom>
+          <a:noFill/>
+        </p:spPr>
+        <p:txBody>
+          <a:bodyPr wrap="square">
+            <a:spAutoFit/>
+          </a:bodyPr>
+          <a:lstStyle/>
+          <a:p>
+            <a:pPr algn="l">
+              <a:defRPr sz="1100" b="1">
+                <a:solidFill>
+                  <a:srgbClr val="F59E0B"/>
+                </a:solidFill>
+                <a:latin typeface="Microsoft YaHei"/>
+              </a:defRPr>
+            </a:pPr>
+            <a:r>
+              <a:t>问：</a:t>
+            </a:r>
+          </a:p>
+        </p:txBody>
+      </p:sp>
+      <p:sp>
+        <p:nvSpPr>
+          <p:cNvPr id="24" name="TextBox 23"/>
+          <p:cNvSpPr txBox="1"/>
+          <p:nvPr/>
+        </p:nvSpPr>
+        <p:spPr>
+          <a:xfrm>
+            <a:off x="1051560" y="5440680"/>
+            <a:ext cx="3200400" cy="228600"/>
+          </a:xfrm>
+          <a:prstGeom prst="rect">
+            <a:avLst/>
+          </a:prstGeom>
+          <a:noFill/>
+        </p:spPr>
+        <p:txBody>
+          <a:bodyPr wrap="square">
+            <a:spAutoFit/>
+          </a:bodyPr>
+          <a:lstStyle/>
+          <a:p>
+            <a:pPr algn="l">
+              <a:defRPr sz="1100" b="0">
+                <a:solidFill>
+                  <a:srgbClr val="1E293B"/>
+                </a:solidFill>
+                <a:latin typeface="Microsoft YaHei"/>
+              </a:defRPr>
+            </a:pPr>
+            <a:r>
+              <a:t>Embedding API 限流怎么办？</a:t>
+            </a:r>
+          </a:p>
+        </p:txBody>
+      </p:sp>
+      <p:sp>
+        <p:nvSpPr>
+          <p:cNvPr id="25" name="TextBox 24"/>
+          <p:cNvSpPr txBox="1"/>
+          <p:nvPr/>
+        </p:nvSpPr>
+        <p:spPr>
+          <a:xfrm>
+            <a:off x="4251960" y="5440680"/>
+            <a:ext cx="274320" cy="228600"/>
+          </a:xfrm>
+          <a:prstGeom prst="rect">
+            <a:avLst/>
+          </a:prstGeom>
+          <a:noFill/>
+        </p:spPr>
+        <p:txBody>
+          <a:bodyPr wrap="square">
+            <a:spAutoFit/>
+          </a:bodyPr>
+          <a:lstStyle/>
+          <a:p>
+            <a:pPr algn="l">
+              <a:defRPr sz="1100" b="1">
+                <a:solidFill>
+                  <a:srgbClr val="10B981"/>
+                </a:solidFill>
+                <a:latin typeface="Microsoft YaHei"/>
+              </a:defRPr>
+            </a:pPr>
+            <a:r>
+              <a:t>答：</a:t>
+            </a:r>
+          </a:p>
+        </p:txBody>
+      </p:sp>
+      <p:sp>
+        <p:nvSpPr>
+          <p:cNvPr id="26" name="TextBox 25"/>
+          <p:cNvSpPr txBox="1"/>
+          <p:nvPr/>
+        </p:nvSpPr>
+        <p:spPr>
+          <a:xfrm>
+            <a:off x="4480560" y="5440680"/>
+            <a:ext cx="6858000" cy="228600"/>
+          </a:xfrm>
+          <a:prstGeom prst="rect">
+            <a:avLst/>
+          </a:prstGeom>
+          <a:noFill/>
+        </p:spPr>
+        <p:txBody>
+          <a:bodyPr wrap="square">
+            <a:spAutoFit/>
+          </a:bodyPr>
+          <a:lstStyle/>
+          <a:p>
+            <a:pPr algn="l">
+              <a:defRPr sz="1100" b="0">
+                <a:solidFill>
+                  <a:srgbClr val="1E293B"/>
+                </a:solidFill>
+                <a:latin typeface="Microsoft YaHei"/>
+              </a:defRPr>
+            </a:pPr>
+            <a:r>
+              <a:t>本地 GPU 嵌入，完全离线不存在限流问题</a:t>
+            </a:r>
+          </a:p>
+        </p:txBody>
+      </p:sp>
+      <p:sp>
+        <p:nvSpPr>
+          <p:cNvPr id="27" name="TextBox 26"/>
+          <p:cNvSpPr txBox="1"/>
+          <p:nvPr/>
+        </p:nvSpPr>
+        <p:spPr>
+          <a:xfrm>
+            <a:off x="822960" y="5715000"/>
+            <a:ext cx="274320" cy="228600"/>
+          </a:xfrm>
+          <a:prstGeom prst="rect">
+            <a:avLst/>
+          </a:prstGeom>
+          <a:noFill/>
+        </p:spPr>
+        <p:txBody>
+          <a:bodyPr wrap="square">
+            <a:spAutoFit/>
+          </a:bodyPr>
+          <a:lstStyle/>
+          <a:p>
+            <a:pPr algn="l">
+              <a:defRPr sz="1100" b="1">
+                <a:solidFill>
+                  <a:srgbClr val="F59E0B"/>
+                </a:solidFill>
+                <a:latin typeface="Microsoft YaHei"/>
+              </a:defRPr>
+            </a:pPr>
+            <a:r>
+              <a:t>问：</a:t>
+            </a:r>
+          </a:p>
+        </p:txBody>
+      </p:sp>
+      <p:sp>
+        <p:nvSpPr>
+          <p:cNvPr id="28" name="TextBox 27"/>
+          <p:cNvSpPr txBox="1"/>
+          <p:nvPr/>
+        </p:nvSpPr>
+        <p:spPr>
+          <a:xfrm>
+            <a:off x="1051560" y="5715000"/>
+            <a:ext cx="3200400" cy="228600"/>
+          </a:xfrm>
+          <a:prstGeom prst="rect">
+            <a:avLst/>
+          </a:prstGeom>
+          <a:noFill/>
+        </p:spPr>
+        <p:txBody>
+          <a:bodyPr wrap="square">
+            <a:spAutoFit/>
+          </a:bodyPr>
+          <a:lstStyle/>
+          <a:p>
+            <a:pPr algn="l">
+              <a:defRPr sz="1100" b="0">
+                <a:solidFill>
+                  <a:srgbClr val="1E293B"/>
+                </a:solidFill>
+                <a:latin typeface="Microsoft YaHei"/>
+              </a:defRPr>
+            </a:pPr>
+            <a:r>
+              <a:t>向量数据库崩溃怎么恢复？</a:t>
+            </a:r>
+          </a:p>
+        </p:txBody>
+      </p:sp>
+      <p:sp>
+        <p:nvSpPr>
+          <p:cNvPr id="29" name="TextBox 28"/>
+          <p:cNvSpPr txBox="1"/>
+          <p:nvPr/>
+        </p:nvSpPr>
+        <p:spPr>
+          <a:xfrm>
+            <a:off x="4251960" y="5715000"/>
+            <a:ext cx="274320" cy="228600"/>
+          </a:xfrm>
+          <a:prstGeom prst="rect">
+            <a:avLst/>
+          </a:prstGeom>
+          <a:noFill/>
+        </p:spPr>
+        <p:txBody>
+          <a:bodyPr wrap="square">
+            <a:spAutoFit/>
+          </a:bodyPr>
+          <a:lstStyle/>
+          <a:p>
+            <a:pPr algn="l">
+              <a:defRPr sz="1100" b="1">
+                <a:solidFill>
+                  <a:srgbClr val="10B981"/>
+                </a:solidFill>
+                <a:latin typeface="Microsoft YaHei"/>
+              </a:defRPr>
+            </a:pPr>
+            <a:r>
+              <a:t>答：</a:t>
+            </a:r>
+          </a:p>
+        </p:txBody>
+      </p:sp>
+      <p:sp>
+        <p:nvSpPr>
+          <p:cNvPr id="30" name="TextBox 29"/>
+          <p:cNvSpPr txBox="1"/>
+          <p:nvPr/>
+        </p:nvSpPr>
+        <p:spPr>
+          <a:xfrm>
+            <a:off x="4480560" y="5715000"/>
+            <a:ext cx="6858000" cy="228600"/>
+          </a:xfrm>
+          <a:prstGeom prst="rect">
+            <a:avLst/>
+          </a:prstGeom>
+          <a:noFill/>
+        </p:spPr>
+        <p:txBody>
+          <a:bodyPr wrap="square">
+            <a:spAutoFit/>
+          </a:bodyPr>
+          <a:lstStyle/>
+          <a:p>
+            <a:pPr algn="l">
+              <a:defRPr sz="1100" b="0">
+                <a:solidFill>
+                  <a:srgbClr val="1E293B"/>
+                </a:solidFill>
+                <a:latin typeface="Microsoft YaHei"/>
+              </a:defRPr>
+            </a:pPr>
+            <a:r>
+              <a:t>备份 vector_store 目录，5 分钟重建</a:t>
+            </a:r>
+          </a:p>
+        </p:txBody>
+      </p:sp>
+      <p:sp>
+        <p:nvSpPr>
+          <p:cNvPr id="31" name="TextBox 30"/>
+          <p:cNvSpPr txBox="1"/>
+          <p:nvPr/>
+        </p:nvSpPr>
+        <p:spPr>
+          <a:xfrm>
+            <a:off x="822960" y="5989320"/>
+            <a:ext cx="274320" cy="228600"/>
+          </a:xfrm>
+          <a:prstGeom prst="rect">
+            <a:avLst/>
+          </a:prstGeom>
+          <a:noFill/>
+        </p:spPr>
+        <p:txBody>
+          <a:bodyPr wrap="square">
+            <a:spAutoFit/>
+          </a:bodyPr>
+          <a:lstStyle/>
+          <a:p>
+            <a:pPr algn="l">
+              <a:defRPr sz="1100" b="1">
+                <a:solidFill>
+                  <a:srgbClr val="F59E0B"/>
+                </a:solidFill>
+                <a:latin typeface="Microsoft YaHei"/>
+              </a:defRPr>
+            </a:pPr>
+            <a:r>
+              <a:t>问：</a:t>
+            </a:r>
+          </a:p>
+        </p:txBody>
+      </p:sp>
+      <p:sp>
+        <p:nvSpPr>
+          <p:cNvPr id="32" name="TextBox 31"/>
+          <p:cNvSpPr txBox="1"/>
+          <p:nvPr/>
+        </p:nvSpPr>
+        <p:spPr>
+          <a:xfrm>
+            <a:off x="1051560" y="5989320"/>
+            <a:ext cx="3200400" cy="228600"/>
+          </a:xfrm>
+          <a:prstGeom prst="rect">
+            <a:avLst/>
+          </a:prstGeom>
+          <a:noFill/>
+        </p:spPr>
+        <p:txBody>
+          <a:bodyPr wrap="square">
+            <a:spAutoFit/>
+          </a:bodyPr>
+          <a:lstStyle/>
+          <a:p>
+            <a:pPr algn="l">
+              <a:defRPr sz="1100" b="0">
+                <a:solidFill>
+                  <a:srgbClr val="1E293B"/>
+                </a:solidFill>
+                <a:latin typeface="Microsoft YaHei"/>
+              </a:defRPr>
+            </a:pPr>
+            <a:r>
+              <a:t>为什么选 ChromaDB 不是 Milvus？</a:t>
+            </a:r>
+          </a:p>
+        </p:txBody>
+      </p:sp>
+      <p:sp>
+        <p:nvSpPr>
+          <p:cNvPr id="33" name="TextBox 32"/>
+          <p:cNvSpPr txBox="1"/>
+          <p:nvPr/>
+        </p:nvSpPr>
+        <p:spPr>
+          <a:xfrm>
+            <a:off x="4251960" y="5989320"/>
+            <a:ext cx="274320" cy="228600"/>
+          </a:xfrm>
+          <a:prstGeom prst="rect">
+            <a:avLst/>
+          </a:prstGeom>
+          <a:noFill/>
+        </p:spPr>
+        <p:txBody>
+          <a:bodyPr wrap="square">
+            <a:spAutoFit/>
+          </a:bodyPr>
+          <a:lstStyle/>
+          <a:p>
+            <a:pPr algn="l">
+              <a:defRPr sz="1100" b="1">
+                <a:solidFill>
+                  <a:srgbClr val="10B981"/>
+                </a:solidFill>
+                <a:latin typeface="Microsoft YaHei"/>
+              </a:defRPr>
+            </a:pPr>
+            <a:r>
+              <a:t>答：</a:t>
+            </a:r>
+          </a:p>
+        </p:txBody>
+      </p:sp>
+      <p:sp>
+        <p:nvSpPr>
+          <p:cNvPr id="34" name="TextBox 33"/>
+          <p:cNvSpPr txBox="1"/>
+          <p:nvPr/>
+        </p:nvSpPr>
+        <p:spPr>
+          <a:xfrm>
+            <a:off x="4480560" y="5989320"/>
+            <a:ext cx="6858000" cy="228600"/>
+          </a:xfrm>
+          <a:prstGeom prst="rect">
+            <a:avLst/>
+          </a:prstGeom>
+          <a:noFill/>
+        </p:spPr>
+        <p:txBody>
+          <a:bodyPr wrap="square">
+            <a:spAutoFit/>
+          </a:bodyPr>
+          <a:lstStyle/>
+          <a:p>
+            <a:pPr algn="l">
+              <a:defRPr sz="1100" b="0">
+                <a:solidFill>
+                  <a:srgbClr val="1E293B"/>
+                </a:solidFill>
+                <a:latin typeface="Microsoft YaHei"/>
+              </a:defRPr>
+            </a:pPr>
+            <a:r>
+              <a:t>零部署，教育场景够用；做了抽象封装可迁移</a:t>
+            </a:r>
+          </a:p>
+        </p:txBody>
+      </p:sp>
+      <p:sp>
+        <p:nvSpPr>
+          <p:cNvPr id="35" name="TextBox 34"/>
+          <p:cNvSpPr txBox="1"/>
+          <p:nvPr/>
+        </p:nvSpPr>
+        <p:spPr>
+          <a:xfrm>
+            <a:off x="822960" y="6263640"/>
+            <a:ext cx="274320" cy="228600"/>
+          </a:xfrm>
+          <a:prstGeom prst="rect">
+            <a:avLst/>
+          </a:prstGeom>
+          <a:noFill/>
+        </p:spPr>
+        <p:txBody>
+          <a:bodyPr wrap="square">
+            <a:spAutoFit/>
+          </a:bodyPr>
+          <a:lstStyle/>
+          <a:p>
+            <a:pPr algn="l">
+              <a:defRPr sz="1100" b="1">
+                <a:solidFill>
+                  <a:srgbClr val="F59E0B"/>
+                </a:solidFill>
+                <a:latin typeface="Microsoft YaHei"/>
+              </a:defRPr>
+            </a:pPr>
+            <a:r>
+              <a:t>问：</a:t>
+            </a:r>
+          </a:p>
+        </p:txBody>
+      </p:sp>
+      <p:sp>
+        <p:nvSpPr>
+          <p:cNvPr id="36" name="TextBox 35"/>
+          <p:cNvSpPr txBox="1"/>
+          <p:nvPr/>
+        </p:nvSpPr>
+        <p:spPr>
+          <a:xfrm>
+            <a:off x="1051560" y="6263640"/>
+            <a:ext cx="3200400" cy="228600"/>
+          </a:xfrm>
+          <a:prstGeom prst="rect">
+            <a:avLst/>
+          </a:prstGeom>
+          <a:noFill/>
+        </p:spPr>
+        <p:txBody>
+          <a:bodyPr wrap="square">
+            <a:spAutoFit/>
+          </a:bodyPr>
+          <a:lstStyle/>
+          <a:p>
+            <a:pPr algn="l">
+              <a:defRPr sz="1100" b="0">
+                <a:solidFill>
+                  <a:srgbClr val="1E293B"/>
+                </a:solidFill>
+                <a:latin typeface="Microsoft YaHei"/>
+              </a:defRPr>
+            </a:pPr>
+            <a:r>
+              <a:t>1000 篇文档怎么增量更新？</a:t>
+            </a:r>
+          </a:p>
+        </p:txBody>
+      </p:sp>
+      <p:sp>
+        <p:nvSpPr>
+          <p:cNvPr id="37" name="TextBox 36"/>
+          <p:cNvSpPr txBox="1"/>
+          <p:nvPr/>
+        </p:nvSpPr>
+        <p:spPr>
+          <a:xfrm>
+            <a:off x="4251960" y="6263640"/>
+            <a:ext cx="274320" cy="228600"/>
+          </a:xfrm>
+          <a:prstGeom prst="rect">
+            <a:avLst/>
+          </a:prstGeom>
+          <a:noFill/>
+        </p:spPr>
+        <p:txBody>
+          <a:bodyPr wrap="square">
+            <a:spAutoFit/>
+          </a:bodyPr>
+          <a:lstStyle/>
+          <a:p>
+            <a:pPr algn="l">
+              <a:defRPr sz="1100" b="1">
+                <a:solidFill>
+                  <a:srgbClr val="10B981"/>
+                </a:solidFill>
+                <a:latin typeface="Microsoft YaHei"/>
+              </a:defRPr>
+            </a:pPr>
+            <a:r>
+              <a:t>答：</a:t>
+            </a:r>
+          </a:p>
+        </p:txBody>
+      </p:sp>
+      <p:sp>
+        <p:nvSpPr>
+          <p:cNvPr id="38" name="TextBox 37"/>
+          <p:cNvSpPr txBox="1"/>
+          <p:nvPr/>
+        </p:nvSpPr>
+        <p:spPr>
+          <a:xfrm>
+            <a:off x="4480560" y="6263640"/>
+            <a:ext cx="6858000" cy="228600"/>
+          </a:xfrm>
+          <a:prstGeom prst="rect">
+            <a:avLst/>
+          </a:prstGeom>
+          <a:noFill/>
+        </p:spPr>
+        <p:txBody>
+          <a:bodyPr wrap="square">
+            <a:spAutoFit/>
+          </a:bodyPr>
+          <a:lstStyle/>
+          <a:p>
+            <a:pPr algn="l">
+              <a:defRPr sz="1100" b="0">
+                <a:solidFill>
+                  <a:srgbClr val="1E293B"/>
+                </a:solidFill>
+                <a:latin typeface="Microsoft YaHei"/>
+              </a:defRPr>
+            </a:pPr>
+            <a:r>
+              <a:t>当前 upsert 去重，后续可做增量索引</a:t>
+            </a:r>
+          </a:p>
+        </p:txBody>
+      </p:sp>
+    </p:spTree>
+  </p:cSld>
+  <p:clrMapOvr>
+    <a:masterClrMapping/>
+  </p:clrMapOvr>
+</p:sld>
+</file>
+
+<file path=ppt/slides/slide19.xml><?xml version="1.0" encoding="utf-8"?>
 <p:sld xmlns:a="http://schemas.openxmlformats.org/drawingml/2006/main" xmlns:p="http://schemas.openxmlformats.org/presentationml/2006/main" xmlns:r="http://schemas.openxmlformats.org/officeDocument/2006/relationships">
   <p:cSld>
     <p:bg>
@@ -15227,7 +16476,7 @@
               </a:defRPr>
             </a:pPr>
             <a:r>
-              <a:t>代码文档齐全  |  45 个以上测试用例  |  全流程可复现</a:t>
+              <a:t>代码文档齐全  |  68 个单元测试用例  |  全流程完美复现</a:t>
             </a:r>
           </a:p>
         </p:txBody>
@@ -16315,6 +17564,121 @@
             <a:avLst/>
           </a:prstGeom>
           <a:solidFill>
+            <a:srgbClr val="8B5CF6"/>
+          </a:solidFill>
+          <a:ln>
+            <a:noFill/>
+          </a:ln>
+        </p:spPr>
+        <p:style>
+          <a:lnRef idx="1">
+            <a:schemeClr val="accent1"/>
+          </a:lnRef>
+          <a:fillRef idx="3">
+            <a:schemeClr val="accent1"/>
+          </a:fillRef>
+          <a:effectRef idx="2">
+            <a:schemeClr val="accent1"/>
+          </a:effectRef>
+          <a:fontRef idx="minor">
+            <a:schemeClr val="lt1"/>
+          </a:fontRef>
+        </p:style>
+        <p:txBody>
+          <a:bodyPr rtlCol="0" anchor="ctr"/>
+          <a:lstStyle/>
+          <a:p>
+            <a:pPr algn="ctr"/>
+          </a:p>
+        </p:txBody>
+      </p:sp>
+      <p:sp>
+        <p:nvSpPr>
+          <p:cNvPr id="30" name="TextBox 29"/>
+          <p:cNvSpPr txBox="1"/>
+          <p:nvPr/>
+        </p:nvSpPr>
+        <p:spPr>
+          <a:xfrm>
+            <a:off x="6629400" y="4251960"/>
+            <a:ext cx="365760" cy="365760"/>
+          </a:xfrm>
+          <a:prstGeom prst="rect">
+            <a:avLst/>
+          </a:prstGeom>
+          <a:noFill/>
+        </p:spPr>
+        <p:txBody>
+          <a:bodyPr wrap="square">
+            <a:spAutoFit/>
+          </a:bodyPr>
+          <a:lstStyle/>
+          <a:p>
+            <a:pPr algn="ctr">
+              <a:defRPr sz="1400" b="1">
+                <a:solidFill>
+                  <a:srgbClr val="FFFFFF"/>
+                </a:solidFill>
+                <a:latin typeface="Microsoft YaHei"/>
+              </a:defRPr>
+            </a:pPr>
+            <a:r>
+              <a:t>09</a:t>
+            </a:r>
+          </a:p>
+        </p:txBody>
+      </p:sp>
+      <p:sp>
+        <p:nvSpPr>
+          <p:cNvPr id="31" name="TextBox 30"/>
+          <p:cNvSpPr txBox="1"/>
+          <p:nvPr/>
+        </p:nvSpPr>
+        <p:spPr>
+          <a:xfrm>
+            <a:off x="7223760" y="4251960"/>
+            <a:ext cx="4114800" cy="365760"/>
+          </a:xfrm>
+          <a:prstGeom prst="rect">
+            <a:avLst/>
+          </a:prstGeom>
+          <a:noFill/>
+        </p:spPr>
+        <p:txBody>
+          <a:bodyPr wrap="square">
+            <a:spAutoFit/>
+          </a:bodyPr>
+          <a:lstStyle/>
+          <a:p>
+            <a:pPr algn="l">
+              <a:defRPr sz="1700" b="0">
+                <a:solidFill>
+                  <a:srgbClr val="1E293B"/>
+                </a:solidFill>
+                <a:latin typeface="Microsoft YaHei"/>
+              </a:defRPr>
+            </a:pPr>
+            <a:r>
+              <a:t>团队分工技术汇报</a:t>
+            </a:r>
+          </a:p>
+        </p:txBody>
+      </p:sp>
+      <p:sp>
+        <p:nvSpPr>
+          <p:cNvPr id="32" name="Oval 31"/>
+          <p:cNvSpPr/>
+          <p:nvPr/>
+        </p:nvSpPr>
+        <p:spPr>
+          <a:xfrm>
+            <a:off x="6583680" y="5166360"/>
+            <a:ext cx="457200" cy="457200"/>
+          </a:xfrm>
+          <a:prstGeom prst="ellipse">
+            <a:avLst/>
+          </a:prstGeom>
+          <a:solidFill>
             <a:srgbClr val="F59E0B"/>
           </a:solidFill>
           <a:ln>
@@ -16345,13 +17709,13 @@
       </p:sp>
       <p:sp>
         <p:nvSpPr>
-          <p:cNvPr id="30" name="TextBox 29"/>
-          <p:cNvSpPr txBox="1"/>
-          <p:nvPr/>
-        </p:nvSpPr>
-        <p:spPr>
-          <a:xfrm>
-            <a:off x="6629400" y="4251960"/>
+          <p:cNvPr id="33" name="TextBox 32"/>
+          <p:cNvSpPr txBox="1"/>
+          <p:nvPr/>
+        </p:nvSpPr>
+        <p:spPr>
+          <a:xfrm>
+            <a:off x="6629400" y="5212080"/>
             <a:ext cx="365760" cy="365760"/>
           </a:xfrm>
           <a:prstGeom prst="rect">
@@ -16374,20 +17738,20 @@
               </a:defRPr>
             </a:pPr>
             <a:r>
-              <a:t>09</a:t>
-            </a:r>
-          </a:p>
-        </p:txBody>
-      </p:sp>
-      <p:sp>
-        <p:nvSpPr>
-          <p:cNvPr id="31" name="TextBox 30"/>
-          <p:cNvSpPr txBox="1"/>
-          <p:nvPr/>
-        </p:nvSpPr>
-        <p:spPr>
-          <a:xfrm>
-            <a:off x="7223760" y="4251960"/>
+              <a:t>10</a:t>
+            </a:r>
+          </a:p>
+        </p:txBody>
+      </p:sp>
+      <p:sp>
+        <p:nvSpPr>
+          <p:cNvPr id="34" name="TextBox 33"/>
+          <p:cNvSpPr txBox="1"/>
+          <p:nvPr/>
+        </p:nvSpPr>
+        <p:spPr>
+          <a:xfrm>
+            <a:off x="7223760" y="5212080"/>
             <a:ext cx="4114800" cy="365760"/>
           </a:xfrm>
           <a:prstGeom prst="rect">
@@ -16410,7 +17774,7 @@
               </a:defRPr>
             </a:pPr>
             <a:r>
-              <a:t>演示环节</a:t>
+              <a:t>演示与答辩准备</a:t>
             </a:r>
           </a:p>
         </p:txBody>
@@ -18096,7 +19460,7 @@
               </a:defRPr>
             </a:pPr>
             <a:r>
-              <a:t>输入：data/raw/ -&gt; 98 篇文档（46 篇课程资料 + 52 篇 Wikipedia 词条）</a:t>
+              <a:t>输入：data/raw/ -&gt; 176 篇文档（45 篇课程资料 + 83 篇 Wiki + 30 篇 SO + 18 篇 CSDN）</a:t>
             </a:r>
           </a:p>
         </p:txBody>
@@ -18176,7 +19540,7 @@
               <a:spcAft>
                 <a:spcPts val="400"/>
               </a:spcAft>
-              <a:defRPr sz="1200" b="0">
+              <a:defRPr sz="1200">
                 <a:solidFill>
                   <a:srgbClr val="6B7280"/>
                 </a:solidFill>
@@ -18828,7 +20192,7 @@
               </a:defRPr>
             </a:pPr>
             <a:r>
-              <a:t>  * Wikipedia REST API 免费调用</a:t>
+              <a:t>  * 多源语料库高敏捷采集与转换</a:t>
             </a:r>
           </a:p>
         </p:txBody>
@@ -18864,7 +20228,7 @@
               </a:defRPr>
             </a:pPr>
             <a:r>
-              <a:t>  * 58 个话题成功采集 52 个</a:t>
+              <a:t>  * Wikipedia 词条 83 篇 (Wiki REST API)</a:t>
             </a:r>
           </a:p>
         </p:txBody>
@@ -18900,7 +20264,7 @@
               </a:defRPr>
             </a:pPr>
             <a:r>
-              <a:t>  * 优先中文失败回退英文</a:t>
+              <a:t>  * Stack Overflow 高票问答 30 篇 (译为全中文)</a:t>
             </a:r>
           </a:p>
         </p:txBody>
@@ -18936,7 +20300,7 @@
               </a:defRPr>
             </a:pPr>
             <a:r>
-              <a:t>  * 限速保护 2 秒间隔 3 次重试</a:t>
+              <a:t>  * CSDN 技术博客 18 篇</a:t>
             </a:r>
           </a:p>
         </p:txBody>
@@ -18972,7 +20336,7 @@
               </a:defRPr>
             </a:pPr>
             <a:r>
-              <a:t>  * 429 自动等待 404 直接跳过</a:t>
+              <a:t>  * 多线程/速率限制 (429) 指数退避重试</a:t>
             </a:r>
           </a:p>
         </p:txBody>
@@ -19008,7 +20372,7 @@
               </a:defRPr>
             </a:pPr>
             <a:r>
-              <a:t>  * 输出带 Front-Matter 的 MD 文件</a:t>
+              <a:t>  * 统一自动转换为纯净 Markdown 存储</a:t>
             </a:r>
           </a:p>
         </p:txBody>
@@ -20598,14 +21962,50 @@
               </a:defRPr>
             </a:pPr>
             <a:r>
-              <a:t>  * 98 篇文档成本小于 0.5 元</a:t>
-            </a:r>
-          </a:p>
-        </p:txBody>
-      </p:sp>
-      <p:sp>
-        <p:nvSpPr>
-          <p:cNvPr id="13" name="Rectangle 12"/>
+              <a:t>  * 176 篇文档元数据并发提取</a:t>
+            </a:r>
+          </a:p>
+        </p:txBody>
+      </p:sp>
+      <p:sp>
+        <p:nvSpPr>
+          <p:cNvPr id="13" name="TextBox 12"/>
+          <p:cNvSpPr txBox="1"/>
+          <p:nvPr/>
+        </p:nvSpPr>
+        <p:spPr>
+          <a:xfrm>
+            <a:off x="731520" y="3154680"/>
+            <a:ext cx="4937760" cy="237744"/>
+          </a:xfrm>
+          <a:prstGeom prst="rect">
+            <a:avLst/>
+          </a:prstGeom>
+          <a:noFill/>
+        </p:spPr>
+        <p:txBody>
+          <a:bodyPr wrap="square">
+            <a:spAutoFit/>
+          </a:bodyPr>
+          <a:lstStyle/>
+          <a:p>
+            <a:pPr algn="l">
+              <a:defRPr sz="1200" b="0">
+                <a:solidFill>
+                  <a:srgbClr val="1E293B"/>
+                </a:solidFill>
+                <a:latin typeface="Microsoft YaHei"/>
+              </a:defRPr>
+            </a:pPr>
+            <a:r>
+              <a:t>  * 32 线程并发提取，仅需 ~20 秒</a:t>
+            </a:r>
+          </a:p>
+        </p:txBody>
+      </p:sp>
+      <p:sp>
+        <p:nvSpPr>
+          <p:cNvPr id="14" name="Rectangle 13"/>
           <p:cNvSpPr/>
           <p:nvPr/>
         </p:nvSpPr>
@@ -20648,7 +22048,7 @@
       </p:sp>
       <p:sp>
         <p:nvSpPr>
-          <p:cNvPr id="14" name="Rectangle 13"/>
+          <p:cNvPr id="15" name="Rectangle 14"/>
           <p:cNvSpPr/>
           <p:nvPr/>
         </p:nvSpPr>
@@ -20691,7 +22091,7 @@
       </p:sp>
       <p:sp>
         <p:nvSpPr>
-          <p:cNvPr id="15" name="TextBox 14"/>
+          <p:cNvPr id="16" name="TextBox 15"/>
           <p:cNvSpPr txBox="1"/>
           <p:nvPr/>
         </p:nvSpPr>
@@ -20727,7 +22127,7 @@
       </p:sp>
       <p:sp>
         <p:nvSpPr>
-          <p:cNvPr id="16" name="TextBox 15"/>
+          <p:cNvPr id="17" name="TextBox 16"/>
           <p:cNvSpPr txBox="1"/>
           <p:nvPr/>
         </p:nvSpPr>
@@ -20763,7 +22163,7 @@
       </p:sp>
       <p:sp>
         <p:nvSpPr>
-          <p:cNvPr id="17" name="TextBox 16"/>
+          <p:cNvPr id="18" name="TextBox 17"/>
           <p:cNvSpPr txBox="1"/>
           <p:nvPr/>
         </p:nvSpPr>
@@ -20799,7 +22199,7 @@
       </p:sp>
       <p:sp>
         <p:nvSpPr>
-          <p:cNvPr id="18" name="TextBox 17"/>
+          <p:cNvPr id="19" name="TextBox 18"/>
           <p:cNvSpPr txBox="1"/>
           <p:nvPr/>
         </p:nvSpPr>
@@ -20835,7 +22235,7 @@
       </p:sp>
       <p:sp>
         <p:nvSpPr>
-          <p:cNvPr id="19" name="TextBox 18"/>
+          <p:cNvPr id="20" name="TextBox 19"/>
           <p:cNvSpPr txBox="1"/>
           <p:nvPr/>
         </p:nvSpPr>
@@ -20871,7 +22271,7 @@
       </p:sp>
       <p:sp>
         <p:nvSpPr>
-          <p:cNvPr id="20" name="TextBox 19"/>
+          <p:cNvPr id="21" name="TextBox 20"/>
           <p:cNvSpPr txBox="1"/>
           <p:nvPr/>
         </p:nvSpPr>
@@ -20907,7 +22307,7 @@
       </p:sp>
       <p:sp>
         <p:nvSpPr>
-          <p:cNvPr id="21" name="Rectangle 20"/>
+          <p:cNvPr id="22" name="Rectangle 21"/>
           <p:cNvSpPr/>
           <p:nvPr/>
         </p:nvSpPr>
@@ -20950,7 +22350,7 @@
       </p:sp>
       <p:sp>
         <p:nvSpPr>
-          <p:cNvPr id="22" name="Rectangle 21"/>
+          <p:cNvPr id="23" name="Rectangle 22"/>
           <p:cNvSpPr/>
           <p:nvPr/>
         </p:nvSpPr>
@@ -20993,7 +22393,7 @@
       </p:sp>
       <p:sp>
         <p:nvSpPr>
-          <p:cNvPr id="23" name="TextBox 22"/>
+          <p:cNvPr id="24" name="TextBox 23"/>
           <p:cNvSpPr txBox="1"/>
           <p:nvPr/>
         </p:nvSpPr>
@@ -22346,7 +23746,7 @@
               </a:defRPr>
             </a:pPr>
             <a:r>
-              <a:t>* 编码 130 多个文本块仅需 10-20 秒（GPU 加速）</a:t>
+              <a:t>* 编码 450 多个文本块仅需 10-20 秒（GPU 加速）</a:t>
             </a:r>
           </a:p>
         </p:txBody>

--- a/final exam2/BigData_RAG_答辩演示.pptx
+++ b/final exam2/BigData_RAG_答辩演示.pptx
@@ -5862,7 +5862,7 @@
               </a:defRPr>
             </a:pPr>
             <a:r>
-              <a:t>  * main.py（118 行）- CLI 入口</a:t>
+              <a:t>  * main.py（218 行）- CLI 入口</a:t>
             </a:r>
           </a:p>
         </p:txBody>
@@ -5898,7 +5898,7 @@
               </a:defRPr>
             </a:pPr>
             <a:r>
-              <a:t>  * ingest.py（104 行）- 文档加载</a:t>
+              <a:t>  * ingest.py（107 行）- 文档加载</a:t>
             </a:r>
           </a:p>
         </p:txBody>
@@ -5934,7 +5934,7 @@
               </a:defRPr>
             </a:pPr>
             <a:r>
-              <a:t>  * preprocess.py（301 行）- 清洗分块</a:t>
+              <a:t>  * preprocess.py（431 行）- 清洗分块</a:t>
             </a:r>
           </a:p>
         </p:txBody>
@@ -5970,7 +5970,7 @@
               </a:defRPr>
             </a:pPr>
             <a:r>
-              <a:t>  * embed_store.py（210 行）- 向量存储</a:t>
+              <a:t>  * embed_store.py（325 行）- 向量存储</a:t>
             </a:r>
           </a:p>
         </p:txBody>
@@ -6006,7 +6006,7 @@
               </a:defRPr>
             </a:pPr>
             <a:r>
-              <a:t>  * qa.py（71 行）- 答案生成</a:t>
+              <a:t>  * qa.py（110 行）- 答案生成</a:t>
             </a:r>
           </a:p>
         </p:txBody>
@@ -6042,7 +6042,7 @@
               </a:defRPr>
             </a:pPr>
             <a:r>
-              <a:t>  * query_parser.py（113 行）- 查询解析</a:t>
+              <a:t>  * query_parser.py（114 行）- 查询解析</a:t>
             </a:r>
           </a:p>
         </p:txBody>
@@ -6078,7 +6078,7 @@
               </a:defRPr>
             </a:pPr>
             <a:r>
-              <a:t>  * collect_corpus.py（199 行）- 语料采集</a:t>
+              <a:t>  * collect_corpus.py（208 行）- 语料采集</a:t>
             </a:r>
           </a:p>
         </p:txBody>
@@ -6114,7 +6114,7 @@
               </a:defRPr>
             </a:pPr>
             <a:r>
-              <a:t>  * utils.py（79 行）- 工具函数</a:t>
+              <a:t>  * utils.py（85 行）- 工具函数</a:t>
             </a:r>
           </a:p>
         </p:txBody>
@@ -6272,7 +6272,7 @@
               </a:defRPr>
             </a:pPr>
             <a:r>
-              <a:t>  * test_preprocess - 清洗/分块/元数据/异常</a:t>
+              <a:t>  * test_preprocess - 7 类 27 测试（清洗/分块/元数据）</a:t>
             </a:r>
           </a:p>
         </p:txBody>
@@ -6308,7 +6308,7 @@
               </a:defRPr>
             </a:pPr>
             <a:r>
-              <a:t>  * test_ingest - 嵌套 YAML 解析与异常退避</a:t>
+              <a:t>  * test_ingest - 2 类 12 测试（YAML 解析/异常边界）</a:t>
             </a:r>
           </a:p>
         </p:txBody>
@@ -6344,7 +6344,7 @@
               </a:defRPr>
             </a:pPr>
             <a:r>
-              <a:t>  * test_query_parser - 格式错误与降级过滤</a:t>
+              <a:t>  * test_query_parser - 1 类 5 测试（格式错误/降级）</a:t>
             </a:r>
           </a:p>
         </p:txBody>
@@ -6380,7 +6380,7 @@
               </a:defRPr>
             </a:pPr>
             <a:r>
-              <a:t>  * test_embed_store - upsert/where_document 过滤</a:t>
+              <a:t>  * test_embed_store - 4 类 10 测试（upsert/过滤/回退）</a:t>
             </a:r>
           </a:p>
         </p:txBody>
@@ -6416,7 +6416,7 @@
               </a:defRPr>
             </a:pPr>
             <a:r>
-              <a:t>  * test_qa - 超长熔断/多轮会话/防幻觉</a:t>
+              <a:t>  * test_qa - 2 类 10 测试（空文档/引用补全/异常）</a:t>
             </a:r>
           </a:p>
         </p:txBody>
@@ -6452,7 +6452,7 @@
               </a:defRPr>
             </a:pPr>
             <a:r>
-              <a:t>  * test_integration - 整体全链路冒烟测试</a:t>
+              <a:t>  * test_integration - 3 类 4 测试（全链路冒烟）</a:t>
             </a:r>
           </a:p>
         </p:txBody>
@@ -6524,7 +6524,7 @@
               </a:defRPr>
             </a:pPr>
             <a:r>
-              <a:t>  * 68 个测试用例 100% 成功通过 (Passed)</a:t>
+              <a:t>  * 19 类 68 个测试用例 100% 成功通过 (Passed)</a:t>
             </a:r>
           </a:p>
         </p:txBody>
@@ -7001,7 +7001,7 @@
         </p:nvSpPr>
         <p:spPr>
           <a:xfrm>
-            <a:off x="822960" y="2514600"/>
+            <a:off x="822960" y="2423160"/>
             <a:ext cx="1828800" cy="320040"/>
           </a:xfrm>
           <a:prstGeom prst="rect">
@@ -7037,7 +7037,7 @@
         </p:nvSpPr>
         <p:spPr>
           <a:xfrm>
-            <a:off x="2743200" y="2514600"/>
+            <a:off x="2743200" y="2423160"/>
             <a:ext cx="36576" cy="320040"/>
           </a:xfrm>
           <a:prstGeom prst="rect">
@@ -7080,7 +7080,7 @@
         </p:nvSpPr>
         <p:spPr>
           <a:xfrm>
-            <a:off x="2926080" y="2514600"/>
+            <a:off x="2926080" y="2423160"/>
             <a:ext cx="2743200" cy="320040"/>
           </a:xfrm>
           <a:prstGeom prst="rect">
@@ -7116,7 +7116,7 @@
         </p:nvSpPr>
         <p:spPr>
           <a:xfrm>
-            <a:off x="822960" y="3017520"/>
+            <a:off x="822960" y="2834640"/>
             <a:ext cx="1828800" cy="320040"/>
           </a:xfrm>
           <a:prstGeom prst="rect">
@@ -7139,7 +7139,7 @@
               </a:defRPr>
             </a:pPr>
             <a:r>
-              <a:t>文档总数</a:t>
+              <a:t>Stack Overflow</a:t>
             </a:r>
           </a:p>
         </p:txBody>
@@ -7152,7 +7152,237 @@
         </p:nvSpPr>
         <p:spPr>
           <a:xfrm>
-            <a:off x="2743200" y="3017520"/>
+            <a:off x="2743200" y="2834640"/>
+            <a:ext cx="36576" cy="320040"/>
+          </a:xfrm>
+          <a:prstGeom prst="rect">
+            <a:avLst/>
+          </a:prstGeom>
+          <a:solidFill>
+            <a:srgbClr val="F59E0B"/>
+          </a:solidFill>
+          <a:ln>
+            <a:noFill/>
+          </a:ln>
+        </p:spPr>
+        <p:style>
+          <a:lnRef idx="1">
+            <a:schemeClr val="accent1"/>
+          </a:lnRef>
+          <a:fillRef idx="3">
+            <a:schemeClr val="accent1"/>
+          </a:fillRef>
+          <a:effectRef idx="2">
+            <a:schemeClr val="accent1"/>
+          </a:effectRef>
+          <a:fontRef idx="minor">
+            <a:schemeClr val="lt1"/>
+          </a:fontRef>
+        </p:style>
+        <p:txBody>
+          <a:bodyPr rtlCol="0" anchor="ctr"/>
+          <a:lstStyle/>
+          <a:p>
+            <a:pPr algn="ctr"/>
+          </a:p>
+        </p:txBody>
+      </p:sp>
+      <p:sp>
+        <p:nvSpPr>
+          <p:cNvPr id="15" name="TextBox 14"/>
+          <p:cNvSpPr txBox="1"/>
+          <p:nvPr/>
+        </p:nvSpPr>
+        <p:spPr>
+          <a:xfrm>
+            <a:off x="2926080" y="2834640"/>
+            <a:ext cx="2743200" cy="320040"/>
+          </a:xfrm>
+          <a:prstGeom prst="rect">
+            <a:avLst/>
+          </a:prstGeom>
+          <a:noFill/>
+        </p:spPr>
+        <p:txBody>
+          <a:bodyPr wrap="square">
+            <a:spAutoFit/>
+          </a:bodyPr>
+          <a:lstStyle/>
+          <a:p>
+            <a:pPr algn="l">
+              <a:defRPr sz="1400" b="1">
+                <a:solidFill>
+                  <a:srgbClr val="F59E0B"/>
+                </a:solidFill>
+                <a:latin typeface="Microsoft YaHei"/>
+              </a:defRPr>
+            </a:pPr>
+            <a:r>
+              <a:t>30 篇</a:t>
+            </a:r>
+          </a:p>
+        </p:txBody>
+      </p:sp>
+      <p:sp>
+        <p:nvSpPr>
+          <p:cNvPr id="16" name="TextBox 15"/>
+          <p:cNvSpPr txBox="1"/>
+          <p:nvPr/>
+        </p:nvSpPr>
+        <p:spPr>
+          <a:xfrm>
+            <a:off x="822960" y="3246120"/>
+            <a:ext cx="1828800" cy="320040"/>
+          </a:xfrm>
+          <a:prstGeom prst="rect">
+            <a:avLst/>
+          </a:prstGeom>
+          <a:noFill/>
+        </p:spPr>
+        <p:txBody>
+          <a:bodyPr wrap="square">
+            <a:spAutoFit/>
+          </a:bodyPr>
+          <a:lstStyle/>
+          <a:p>
+            <a:pPr algn="l">
+              <a:defRPr sz="1300" b="0">
+                <a:solidFill>
+                  <a:srgbClr val="6B7280"/>
+                </a:solidFill>
+                <a:latin typeface="Microsoft YaHei"/>
+              </a:defRPr>
+            </a:pPr>
+            <a:r>
+              <a:t>CSDN 博客</a:t>
+            </a:r>
+          </a:p>
+        </p:txBody>
+      </p:sp>
+      <p:sp>
+        <p:nvSpPr>
+          <p:cNvPr id="17" name="Rectangle 16"/>
+          <p:cNvSpPr/>
+          <p:nvPr/>
+        </p:nvSpPr>
+        <p:spPr>
+          <a:xfrm>
+            <a:off x="2743200" y="3246120"/>
+            <a:ext cx="36576" cy="320040"/>
+          </a:xfrm>
+          <a:prstGeom prst="rect">
+            <a:avLst/>
+          </a:prstGeom>
+          <a:solidFill>
+            <a:srgbClr val="8B5CF6"/>
+          </a:solidFill>
+          <a:ln>
+            <a:noFill/>
+          </a:ln>
+        </p:spPr>
+        <p:style>
+          <a:lnRef idx="1">
+            <a:schemeClr val="accent1"/>
+          </a:lnRef>
+          <a:fillRef idx="3">
+            <a:schemeClr val="accent1"/>
+          </a:fillRef>
+          <a:effectRef idx="2">
+            <a:schemeClr val="accent1"/>
+          </a:effectRef>
+          <a:fontRef idx="minor">
+            <a:schemeClr val="lt1"/>
+          </a:fontRef>
+        </p:style>
+        <p:txBody>
+          <a:bodyPr rtlCol="0" anchor="ctr"/>
+          <a:lstStyle/>
+          <a:p>
+            <a:pPr algn="ctr"/>
+          </a:p>
+        </p:txBody>
+      </p:sp>
+      <p:sp>
+        <p:nvSpPr>
+          <p:cNvPr id="18" name="TextBox 17"/>
+          <p:cNvSpPr txBox="1"/>
+          <p:nvPr/>
+        </p:nvSpPr>
+        <p:spPr>
+          <a:xfrm>
+            <a:off x="2926080" y="3246120"/>
+            <a:ext cx="2743200" cy="320040"/>
+          </a:xfrm>
+          <a:prstGeom prst="rect">
+            <a:avLst/>
+          </a:prstGeom>
+          <a:noFill/>
+        </p:spPr>
+        <p:txBody>
+          <a:bodyPr wrap="square">
+            <a:spAutoFit/>
+          </a:bodyPr>
+          <a:lstStyle/>
+          <a:p>
+            <a:pPr algn="l">
+              <a:defRPr sz="1400" b="1">
+                <a:solidFill>
+                  <a:srgbClr val="8B5CF6"/>
+                </a:solidFill>
+                <a:latin typeface="Microsoft YaHei"/>
+              </a:defRPr>
+            </a:pPr>
+            <a:r>
+              <a:t>18 篇</a:t>
+            </a:r>
+          </a:p>
+        </p:txBody>
+      </p:sp>
+      <p:sp>
+        <p:nvSpPr>
+          <p:cNvPr id="19" name="TextBox 18"/>
+          <p:cNvSpPr txBox="1"/>
+          <p:nvPr/>
+        </p:nvSpPr>
+        <p:spPr>
+          <a:xfrm>
+            <a:off x="822960" y="3657600"/>
+            <a:ext cx="1828800" cy="320040"/>
+          </a:xfrm>
+          <a:prstGeom prst="rect">
+            <a:avLst/>
+          </a:prstGeom>
+          <a:noFill/>
+        </p:spPr>
+        <p:txBody>
+          <a:bodyPr wrap="square">
+            <a:spAutoFit/>
+          </a:bodyPr>
+          <a:lstStyle/>
+          <a:p>
+            <a:pPr algn="l">
+              <a:defRPr sz="1300" b="0">
+                <a:solidFill>
+                  <a:srgbClr val="6B7280"/>
+                </a:solidFill>
+                <a:latin typeface="Microsoft YaHei"/>
+              </a:defRPr>
+            </a:pPr>
+            <a:r>
+              <a:t>文档总数</a:t>
+            </a:r>
+          </a:p>
+        </p:txBody>
+      </p:sp>
+      <p:sp>
+        <p:nvSpPr>
+          <p:cNvPr id="20" name="Rectangle 19"/>
+          <p:cNvSpPr/>
+          <p:nvPr/>
+        </p:nvSpPr>
+        <p:spPr>
+          <a:xfrm>
+            <a:off x="2743200" y="3657600"/>
             <a:ext cx="36576" cy="320040"/>
           </a:xfrm>
           <a:prstGeom prst="rect">
@@ -7189,13 +7419,13 @@
       </p:sp>
       <p:sp>
         <p:nvSpPr>
-          <p:cNvPr id="15" name="TextBox 14"/>
-          <p:cNvSpPr txBox="1"/>
-          <p:nvPr/>
-        </p:nvSpPr>
-        <p:spPr>
-          <a:xfrm>
-            <a:off x="2926080" y="3017520"/>
+          <p:cNvPr id="21" name="TextBox 20"/>
+          <p:cNvSpPr txBox="1"/>
+          <p:nvPr/>
+        </p:nvSpPr>
+        <p:spPr>
+          <a:xfrm>
+            <a:off x="2926080" y="3657600"/>
             <a:ext cx="2743200" cy="320040"/>
           </a:xfrm>
           <a:prstGeom prst="rect">
@@ -7225,13 +7455,13 @@
       </p:sp>
       <p:sp>
         <p:nvSpPr>
-          <p:cNvPr id="16" name="TextBox 15"/>
-          <p:cNvSpPr txBox="1"/>
-          <p:nvPr/>
-        </p:nvSpPr>
-        <p:spPr>
-          <a:xfrm>
-            <a:off x="822960" y="3520440"/>
+          <p:cNvPr id="22" name="TextBox 21"/>
+          <p:cNvSpPr txBox="1"/>
+          <p:nvPr/>
+        </p:nvSpPr>
+        <p:spPr>
+          <a:xfrm>
+            <a:off x="822960" y="4069080"/>
             <a:ext cx="1828800" cy="320040"/>
           </a:xfrm>
           <a:prstGeom prst="rect">
@@ -7261,13 +7491,13 @@
       </p:sp>
       <p:sp>
         <p:nvSpPr>
-          <p:cNvPr id="17" name="Rectangle 16"/>
+          <p:cNvPr id="23" name="Rectangle 22"/>
           <p:cNvSpPr/>
           <p:nvPr/>
         </p:nvSpPr>
         <p:spPr>
           <a:xfrm>
-            <a:off x="2743200" y="3520440"/>
+            <a:off x="2743200" y="4069080"/>
             <a:ext cx="36576" cy="320040"/>
           </a:xfrm>
           <a:prstGeom prst="rect">
@@ -7304,13 +7534,13 @@
       </p:sp>
       <p:sp>
         <p:nvSpPr>
-          <p:cNvPr id="18" name="TextBox 17"/>
-          <p:cNvSpPr txBox="1"/>
-          <p:nvPr/>
-        </p:nvSpPr>
-        <p:spPr>
-          <a:xfrm>
-            <a:off x="2926080" y="3520440"/>
+          <p:cNvPr id="24" name="TextBox 23"/>
+          <p:cNvSpPr txBox="1"/>
+          <p:nvPr/>
+        </p:nvSpPr>
+        <p:spPr>
+          <a:xfrm>
+            <a:off x="2926080" y="4069080"/>
             <a:ext cx="2743200" cy="320040"/>
           </a:xfrm>
           <a:prstGeom prst="rect">
@@ -7340,13 +7570,13 @@
       </p:sp>
       <p:sp>
         <p:nvSpPr>
-          <p:cNvPr id="19" name="TextBox 18"/>
-          <p:cNvSpPr txBox="1"/>
-          <p:nvPr/>
-        </p:nvSpPr>
-        <p:spPr>
-          <a:xfrm>
-            <a:off x="822960" y="4023360"/>
+          <p:cNvPr id="25" name="TextBox 24"/>
+          <p:cNvSpPr txBox="1"/>
+          <p:nvPr/>
+        </p:nvSpPr>
+        <p:spPr>
+          <a:xfrm>
+            <a:off x="822960" y="4480560"/>
             <a:ext cx="1828800" cy="320040"/>
           </a:xfrm>
           <a:prstGeom prst="rect">
@@ -7376,13 +7606,13 @@
       </p:sp>
       <p:sp>
         <p:nvSpPr>
-          <p:cNvPr id="20" name="Rectangle 19"/>
+          <p:cNvPr id="26" name="Rectangle 25"/>
           <p:cNvSpPr/>
           <p:nvPr/>
         </p:nvSpPr>
         <p:spPr>
           <a:xfrm>
-            <a:off x="2743200" y="4023360"/>
+            <a:off x="2743200" y="4480560"/>
             <a:ext cx="36576" cy="320040"/>
           </a:xfrm>
           <a:prstGeom prst="rect">
@@ -7419,13 +7649,13 @@
       </p:sp>
       <p:sp>
         <p:nvSpPr>
-          <p:cNvPr id="21" name="TextBox 20"/>
-          <p:cNvSpPr txBox="1"/>
-          <p:nvPr/>
-        </p:nvSpPr>
-        <p:spPr>
-          <a:xfrm>
-            <a:off x="2926080" y="4023360"/>
+          <p:cNvPr id="27" name="TextBox 26"/>
+          <p:cNvSpPr txBox="1"/>
+          <p:nvPr/>
+        </p:nvSpPr>
+        <p:spPr>
+          <a:xfrm>
+            <a:off x="2926080" y="4480560"/>
             <a:ext cx="2743200" cy="320040"/>
           </a:xfrm>
           <a:prstGeom prst="rect">
@@ -7455,7 +7685,7 @@
       </p:sp>
       <p:sp>
         <p:nvSpPr>
-          <p:cNvPr id="22" name="Rectangle 21"/>
+          <p:cNvPr id="28" name="Rectangle 27"/>
           <p:cNvSpPr/>
           <p:nvPr/>
         </p:nvSpPr>
@@ -7498,7 +7728,7 @@
       </p:sp>
       <p:sp>
         <p:nvSpPr>
-          <p:cNvPr id="23" name="TextBox 22"/>
+          <p:cNvPr id="29" name="TextBox 28"/>
           <p:cNvSpPr txBox="1"/>
           <p:nvPr/>
         </p:nvSpPr>
@@ -7534,7 +7764,7 @@
       </p:sp>
       <p:sp>
         <p:nvSpPr>
-          <p:cNvPr id="24" name="TextBox 23"/>
+          <p:cNvPr id="30" name="TextBox 29"/>
           <p:cNvSpPr txBox="1"/>
           <p:nvPr/>
         </p:nvSpPr>
@@ -7570,7 +7800,7 @@
       </p:sp>
       <p:sp>
         <p:nvSpPr>
-          <p:cNvPr id="25" name="TextBox 24"/>
+          <p:cNvPr id="31" name="TextBox 30"/>
           <p:cNvSpPr txBox="1"/>
           <p:nvPr/>
         </p:nvSpPr>
@@ -7599,14 +7829,14 @@
               </a:defRPr>
             </a:pPr>
             <a:r>
-              <a:t>约 0.5 元</a:t>
-            </a:r>
-          </a:p>
-        </p:txBody>
-      </p:sp>
-      <p:sp>
-        <p:nvSpPr>
-          <p:cNvPr id="26" name="TextBox 25"/>
+              <a:t>约 0.88 元</a:t>
+            </a:r>
+          </a:p>
+        </p:txBody>
+      </p:sp>
+      <p:sp>
+        <p:nvSpPr>
+          <p:cNvPr id="32" name="TextBox 31"/>
           <p:cNvSpPr txBox="1"/>
           <p:nvPr/>
         </p:nvSpPr>
@@ -7642,7 +7872,7 @@
       </p:sp>
       <p:sp>
         <p:nvSpPr>
-          <p:cNvPr id="27" name="TextBox 26"/>
+          <p:cNvPr id="33" name="TextBox 32"/>
           <p:cNvSpPr txBox="1"/>
           <p:nvPr/>
         </p:nvSpPr>
@@ -7671,14 +7901,14 @@
               </a:defRPr>
             </a:pPr>
             <a:r>
-              <a:t>约 0.003 元</a:t>
-            </a:r>
-          </a:p>
-        </p:txBody>
-      </p:sp>
-      <p:sp>
-        <p:nvSpPr>
-          <p:cNvPr id="28" name="TextBox 27"/>
+              <a:t>约 0.005 元</a:t>
+            </a:r>
+          </a:p>
+        </p:txBody>
+      </p:sp>
+      <p:sp>
+        <p:nvSpPr>
+          <p:cNvPr id="34" name="TextBox 33"/>
           <p:cNvSpPr txBox="1"/>
           <p:nvPr/>
         </p:nvSpPr>
@@ -7714,7 +7944,7 @@
       </p:sp>
       <p:sp>
         <p:nvSpPr>
-          <p:cNvPr id="29" name="TextBox 28"/>
+          <p:cNvPr id="35" name="TextBox 34"/>
           <p:cNvSpPr txBox="1"/>
           <p:nvPr/>
         </p:nvSpPr>
@@ -7743,14 +7973,14 @@
               </a:defRPr>
             </a:pPr>
             <a:r>
-              <a:t>约 0.005 元</a:t>
-            </a:r>
-          </a:p>
-        </p:txBody>
-      </p:sp>
-      <p:sp>
-        <p:nvSpPr>
-          <p:cNvPr id="30" name="TextBox 29"/>
+              <a:t>约 0.01 元</a:t>
+            </a:r>
+          </a:p>
+        </p:txBody>
+      </p:sp>
+      <p:sp>
+        <p:nvSpPr>
+          <p:cNvPr id="36" name="TextBox 35"/>
           <p:cNvSpPr txBox="1"/>
           <p:nvPr/>
         </p:nvSpPr>
@@ -7786,7 +8016,7 @@
       </p:sp>
       <p:sp>
         <p:nvSpPr>
-          <p:cNvPr id="31" name="TextBox 30"/>
+          <p:cNvPr id="37" name="TextBox 36"/>
           <p:cNvSpPr txBox="1"/>
           <p:nvPr/>
         </p:nvSpPr>
@@ -7822,7 +8052,7 @@
       </p:sp>
       <p:sp>
         <p:nvSpPr>
-          <p:cNvPr id="32" name="TextBox 31"/>
+          <p:cNvPr id="38" name="TextBox 37"/>
           <p:cNvSpPr txBox="1"/>
           <p:nvPr/>
         </p:nvSpPr>
@@ -7858,7 +8088,7 @@
       </p:sp>
       <p:sp>
         <p:nvSpPr>
-          <p:cNvPr id="33" name="TextBox 32"/>
+          <p:cNvPr id="39" name="TextBox 38"/>
           <p:cNvSpPr txBox="1"/>
           <p:nvPr/>
         </p:nvSpPr>
@@ -7887,14 +8117,14 @@
               </a:defRPr>
             </a:pPr>
             <a:r>
-              <a:t>小于 0.8 元</a:t>
-            </a:r>
-          </a:p>
-        </p:txBody>
-      </p:sp>
-      <p:sp>
-        <p:nvSpPr>
-          <p:cNvPr id="34" name="TextBox 33"/>
+              <a:t>小于 1.0 元</a:t>
+            </a:r>
+          </a:p>
+        </p:txBody>
+      </p:sp>
+      <p:sp>
+        <p:nvSpPr>
+          <p:cNvPr id="40" name="TextBox 39"/>
           <p:cNvSpPr txBox="1"/>
           <p:nvPr/>
         </p:nvSpPr>
@@ -7930,7 +8160,7 @@
       </p:sp>
       <p:sp>
         <p:nvSpPr>
-          <p:cNvPr id="35" name="TextBox 34"/>
+          <p:cNvPr id="41" name="TextBox 40"/>
           <p:cNvSpPr txBox="1"/>
           <p:nvPr/>
         </p:nvSpPr>
@@ -7959,14 +8189,14 @@
               </a:defRPr>
             </a:pPr>
             <a:r>
-              <a:t>约 0.01 元</a:t>
-            </a:r>
-          </a:p>
-        </p:txBody>
-      </p:sp>
-      <p:sp>
-        <p:nvSpPr>
-          <p:cNvPr id="36" name="Rectangle 35"/>
+              <a:t>约 0.02 元</a:t>
+            </a:r>
+          </a:p>
+        </p:txBody>
+      </p:sp>
+      <p:sp>
+        <p:nvSpPr>
+          <p:cNvPr id="42" name="Rectangle 41"/>
           <p:cNvSpPr/>
           <p:nvPr/>
         </p:nvSpPr>
@@ -8009,7 +8239,7 @@
       </p:sp>
       <p:sp>
         <p:nvSpPr>
-          <p:cNvPr id="37" name="TextBox 36"/>
+          <p:cNvPr id="43" name="TextBox 42"/>
           <p:cNvSpPr txBox="1"/>
           <p:nvPr/>
         </p:nvSpPr>
@@ -8045,7 +8275,7 @@
       </p:sp>
       <p:sp>
         <p:nvSpPr>
-          <p:cNvPr id="38" name="TextBox 37"/>
+          <p:cNvPr id="44" name="TextBox 43"/>
           <p:cNvSpPr txBox="1"/>
           <p:nvPr/>
         </p:nvSpPr>
@@ -8074,14 +8304,14 @@
               </a:defRPr>
             </a:pPr>
             <a:r>
-              <a:t>文档</a:t>
-            </a:r>
-          </a:p>
-        </p:txBody>
-      </p:sp>
-      <p:sp>
-        <p:nvSpPr>
-          <p:cNvPr id="39" name="Rectangle 38"/>
+              <a:t>文档总数</a:t>
+            </a:r>
+          </a:p>
+        </p:txBody>
+      </p:sp>
+      <p:sp>
+        <p:nvSpPr>
+          <p:cNvPr id="45" name="Rectangle 44"/>
           <p:cNvSpPr/>
           <p:nvPr/>
         </p:nvSpPr>
@@ -8124,7 +8354,7 @@
       </p:sp>
       <p:sp>
         <p:nvSpPr>
-          <p:cNvPr id="40" name="TextBox 39"/>
+          <p:cNvPr id="46" name="TextBox 45"/>
           <p:cNvSpPr txBox="1"/>
           <p:nvPr/>
         </p:nvSpPr>
@@ -8160,7 +8390,7 @@
       </p:sp>
       <p:sp>
         <p:nvSpPr>
-          <p:cNvPr id="41" name="TextBox 40"/>
+          <p:cNvPr id="47" name="TextBox 46"/>
           <p:cNvSpPr txBox="1"/>
           <p:nvPr/>
         </p:nvSpPr>
@@ -8196,13 +8426,243 @@
       </p:sp>
       <p:sp>
         <p:nvSpPr>
-          <p:cNvPr id="42" name="Rectangle 41"/>
+          <p:cNvPr id="48" name="Rectangle 47"/>
           <p:cNvSpPr/>
           <p:nvPr/>
         </p:nvSpPr>
         <p:spPr>
           <a:xfrm>
             <a:off x="4389120" y="5486400"/>
+            <a:ext cx="1645920" cy="731520"/>
+          </a:xfrm>
+          <a:prstGeom prst="rect">
+            <a:avLst/>
+          </a:prstGeom>
+          <a:solidFill>
+            <a:srgbClr val="F59E0B"/>
+          </a:solidFill>
+          <a:ln>
+            <a:noFill/>
+          </a:ln>
+        </p:spPr>
+        <p:style>
+          <a:lnRef idx="1">
+            <a:schemeClr val="accent1"/>
+          </a:lnRef>
+          <a:fillRef idx="3">
+            <a:schemeClr val="accent1"/>
+          </a:fillRef>
+          <a:effectRef idx="2">
+            <a:schemeClr val="accent1"/>
+          </a:effectRef>
+          <a:fontRef idx="minor">
+            <a:schemeClr val="lt1"/>
+          </a:fontRef>
+        </p:style>
+        <p:txBody>
+          <a:bodyPr rtlCol="0" anchor="ctr"/>
+          <a:lstStyle/>
+          <a:p>
+            <a:pPr algn="ctr"/>
+          </a:p>
+        </p:txBody>
+      </p:sp>
+      <p:sp>
+        <p:nvSpPr>
+          <p:cNvPr id="49" name="TextBox 48"/>
+          <p:cNvSpPr txBox="1"/>
+          <p:nvPr/>
+        </p:nvSpPr>
+        <p:spPr>
+          <a:xfrm>
+            <a:off x="4389120" y="5577840"/>
+            <a:ext cx="1645920" cy="365760"/>
+          </a:xfrm>
+          <a:prstGeom prst="rect">
+            <a:avLst/>
+          </a:prstGeom>
+          <a:noFill/>
+        </p:spPr>
+        <p:txBody>
+          <a:bodyPr wrap="square">
+            <a:spAutoFit/>
+          </a:bodyPr>
+          <a:lstStyle/>
+          <a:p>
+            <a:pPr algn="ctr">
+              <a:defRPr sz="2400" b="1">
+                <a:solidFill>
+                  <a:srgbClr val="FFFFFF"/>
+                </a:solidFill>
+                <a:latin typeface="Microsoft YaHei"/>
+              </a:defRPr>
+            </a:pPr>
+            <a:r>
+              <a:t>30</a:t>
+            </a:r>
+          </a:p>
+        </p:txBody>
+      </p:sp>
+      <p:sp>
+        <p:nvSpPr>
+          <p:cNvPr id="50" name="TextBox 49"/>
+          <p:cNvSpPr txBox="1"/>
+          <p:nvPr/>
+        </p:nvSpPr>
+        <p:spPr>
+          <a:xfrm>
+            <a:off x="4389120" y="5897880"/>
+            <a:ext cx="1645920" cy="274320"/>
+          </a:xfrm>
+          <a:prstGeom prst="rect">
+            <a:avLst/>
+          </a:prstGeom>
+          <a:noFill/>
+        </p:spPr>
+        <p:txBody>
+          <a:bodyPr wrap="square">
+            <a:spAutoFit/>
+          </a:bodyPr>
+          <a:lstStyle/>
+          <a:p>
+            <a:pPr algn="ctr">
+              <a:defRPr sz="1100" b="0">
+                <a:solidFill>
+                  <a:srgbClr val="FFFFFF"/>
+                </a:solidFill>
+                <a:latin typeface="Microsoft YaHei"/>
+              </a:defRPr>
+            </a:pPr>
+            <a:r>
+              <a:t>Stack Overflow</a:t>
+            </a:r>
+          </a:p>
+        </p:txBody>
+      </p:sp>
+      <p:sp>
+        <p:nvSpPr>
+          <p:cNvPr id="51" name="Rectangle 50"/>
+          <p:cNvSpPr/>
+          <p:nvPr/>
+        </p:nvSpPr>
+        <p:spPr>
+          <a:xfrm>
+            <a:off x="548640" y="6309360"/>
+            <a:ext cx="1645920" cy="731520"/>
+          </a:xfrm>
+          <a:prstGeom prst="rect">
+            <a:avLst/>
+          </a:prstGeom>
+          <a:solidFill>
+            <a:srgbClr val="8B5CF6"/>
+          </a:solidFill>
+          <a:ln>
+            <a:noFill/>
+          </a:ln>
+        </p:spPr>
+        <p:style>
+          <a:lnRef idx="1">
+            <a:schemeClr val="accent1"/>
+          </a:lnRef>
+          <a:fillRef idx="3">
+            <a:schemeClr val="accent1"/>
+          </a:fillRef>
+          <a:effectRef idx="2">
+            <a:schemeClr val="accent1"/>
+          </a:effectRef>
+          <a:fontRef idx="minor">
+            <a:schemeClr val="lt1"/>
+          </a:fontRef>
+        </p:style>
+        <p:txBody>
+          <a:bodyPr rtlCol="0" anchor="ctr"/>
+          <a:lstStyle/>
+          <a:p>
+            <a:pPr algn="ctr"/>
+          </a:p>
+        </p:txBody>
+      </p:sp>
+      <p:sp>
+        <p:nvSpPr>
+          <p:cNvPr id="52" name="TextBox 51"/>
+          <p:cNvSpPr txBox="1"/>
+          <p:nvPr/>
+        </p:nvSpPr>
+        <p:spPr>
+          <a:xfrm>
+            <a:off x="548640" y="6400800"/>
+            <a:ext cx="1645920" cy="365760"/>
+          </a:xfrm>
+          <a:prstGeom prst="rect">
+            <a:avLst/>
+          </a:prstGeom>
+          <a:noFill/>
+        </p:spPr>
+        <p:txBody>
+          <a:bodyPr wrap="square">
+            <a:spAutoFit/>
+          </a:bodyPr>
+          <a:lstStyle/>
+          <a:p>
+            <a:pPr algn="ctr">
+              <a:defRPr sz="2400" b="1">
+                <a:solidFill>
+                  <a:srgbClr val="FFFFFF"/>
+                </a:solidFill>
+                <a:latin typeface="Microsoft YaHei"/>
+              </a:defRPr>
+            </a:pPr>
+            <a:r>
+              <a:t>18</a:t>
+            </a:r>
+          </a:p>
+        </p:txBody>
+      </p:sp>
+      <p:sp>
+        <p:nvSpPr>
+          <p:cNvPr id="53" name="TextBox 52"/>
+          <p:cNvSpPr txBox="1"/>
+          <p:nvPr/>
+        </p:nvSpPr>
+        <p:spPr>
+          <a:xfrm>
+            <a:off x="548640" y="6720840"/>
+            <a:ext cx="1645920" cy="274320"/>
+          </a:xfrm>
+          <a:prstGeom prst="rect">
+            <a:avLst/>
+          </a:prstGeom>
+          <a:noFill/>
+        </p:spPr>
+        <p:txBody>
+          <a:bodyPr wrap="square">
+            <a:spAutoFit/>
+          </a:bodyPr>
+          <a:lstStyle/>
+          <a:p>
+            <a:pPr algn="ctr">
+              <a:defRPr sz="1100" b="0">
+                <a:solidFill>
+                  <a:srgbClr val="FFFFFF"/>
+                </a:solidFill>
+                <a:latin typeface="Microsoft YaHei"/>
+              </a:defRPr>
+            </a:pPr>
+            <a:r>
+              <a:t>CSDN 博客</a:t>
+            </a:r>
+          </a:p>
+        </p:txBody>
+      </p:sp>
+      <p:sp>
+        <p:nvSpPr>
+          <p:cNvPr id="54" name="Rectangle 53"/>
+          <p:cNvSpPr/>
+          <p:nvPr/>
+        </p:nvSpPr>
+        <p:spPr>
+          <a:xfrm>
+            <a:off x="2468880" y="6309360"/>
             <a:ext cx="1645920" cy="731520"/>
           </a:xfrm>
           <a:prstGeom prst="rect">
@@ -8239,13 +8699,13 @@
       </p:sp>
       <p:sp>
         <p:nvSpPr>
-          <p:cNvPr id="43" name="TextBox 42"/>
-          <p:cNvSpPr txBox="1"/>
-          <p:nvPr/>
-        </p:nvSpPr>
-        <p:spPr>
-          <a:xfrm>
-            <a:off x="4389120" y="5577840"/>
+          <p:cNvPr id="55" name="TextBox 54"/>
+          <p:cNvSpPr txBox="1"/>
+          <p:nvPr/>
+        </p:nvSpPr>
+        <p:spPr>
+          <a:xfrm>
+            <a:off x="2468880" y="6400800"/>
             <a:ext cx="1645920" cy="365760"/>
           </a:xfrm>
           <a:prstGeom prst="rect">
@@ -8268,20 +8728,20 @@
               </a:defRPr>
             </a:pPr>
             <a:r>
-              <a:t>&lt;0.8 元</a:t>
-            </a:r>
-          </a:p>
-        </p:txBody>
-      </p:sp>
-      <p:sp>
-        <p:nvSpPr>
-          <p:cNvPr id="44" name="TextBox 43"/>
-          <p:cNvSpPr txBox="1"/>
-          <p:nvPr/>
-        </p:nvSpPr>
-        <p:spPr>
-          <a:xfrm>
-            <a:off x="4389120" y="5897880"/>
+              <a:t>&lt;1.0 元</a:t>
+            </a:r>
+          </a:p>
+        </p:txBody>
+      </p:sp>
+      <p:sp>
+        <p:nvSpPr>
+          <p:cNvPr id="56" name="TextBox 55"/>
+          <p:cNvSpPr txBox="1"/>
+          <p:nvPr/>
+        </p:nvSpPr>
+        <p:spPr>
+          <a:xfrm>
+            <a:off x="2468880" y="6720840"/>
             <a:ext cx="1645920" cy="274320"/>
           </a:xfrm>
           <a:prstGeom prst="rect">
@@ -8311,237 +8771,7 @@
       </p:sp>
       <p:sp>
         <p:nvSpPr>
-          <p:cNvPr id="45" name="Rectangle 44"/>
-          <p:cNvSpPr/>
-          <p:nvPr/>
-        </p:nvSpPr>
-        <p:spPr>
-          <a:xfrm>
-            <a:off x="548640" y="6309360"/>
-            <a:ext cx="1645920" cy="731520"/>
-          </a:xfrm>
-          <a:prstGeom prst="rect">
-            <a:avLst/>
-          </a:prstGeom>
-          <a:solidFill>
-            <a:srgbClr val="06D6A0"/>
-          </a:solidFill>
-          <a:ln>
-            <a:noFill/>
-          </a:ln>
-        </p:spPr>
-        <p:style>
-          <a:lnRef idx="1">
-            <a:schemeClr val="accent1"/>
-          </a:lnRef>
-          <a:fillRef idx="3">
-            <a:schemeClr val="accent1"/>
-          </a:fillRef>
-          <a:effectRef idx="2">
-            <a:schemeClr val="accent1"/>
-          </a:effectRef>
-          <a:fontRef idx="minor">
-            <a:schemeClr val="lt1"/>
-          </a:fontRef>
-        </p:style>
-        <p:txBody>
-          <a:bodyPr rtlCol="0" anchor="ctr"/>
-          <a:lstStyle/>
-          <a:p>
-            <a:pPr algn="ctr"/>
-          </a:p>
-        </p:txBody>
-      </p:sp>
-      <p:sp>
-        <p:nvSpPr>
-          <p:cNvPr id="46" name="TextBox 45"/>
-          <p:cNvSpPr txBox="1"/>
-          <p:nvPr/>
-        </p:nvSpPr>
-        <p:spPr>
-          <a:xfrm>
-            <a:off x="548640" y="6400800"/>
-            <a:ext cx="1645920" cy="365760"/>
-          </a:xfrm>
-          <a:prstGeom prst="rect">
-            <a:avLst/>
-          </a:prstGeom>
-          <a:noFill/>
-        </p:spPr>
-        <p:txBody>
-          <a:bodyPr wrap="square">
-            <a:spAutoFit/>
-          </a:bodyPr>
-          <a:lstStyle/>
-          <a:p>
-            <a:pPr algn="ctr">
-              <a:defRPr sz="2400" b="1">
-                <a:solidFill>
-                  <a:srgbClr val="FFFFFF"/>
-                </a:solidFill>
-                <a:latin typeface="Microsoft YaHei"/>
-              </a:defRPr>
-            </a:pPr>
-            <a:r>
-              <a:t>1024</a:t>
-            </a:r>
-          </a:p>
-        </p:txBody>
-      </p:sp>
-      <p:sp>
-        <p:nvSpPr>
-          <p:cNvPr id="47" name="TextBox 46"/>
-          <p:cNvSpPr txBox="1"/>
-          <p:nvPr/>
-        </p:nvSpPr>
-        <p:spPr>
-          <a:xfrm>
-            <a:off x="548640" y="6720840"/>
-            <a:ext cx="1645920" cy="274320"/>
-          </a:xfrm>
-          <a:prstGeom prst="rect">
-            <a:avLst/>
-          </a:prstGeom>
-          <a:noFill/>
-        </p:spPr>
-        <p:txBody>
-          <a:bodyPr wrap="square">
-            <a:spAutoFit/>
-          </a:bodyPr>
-          <a:lstStyle/>
-          <a:p>
-            <a:pPr algn="ctr">
-              <a:defRPr sz="1100" b="0">
-                <a:solidFill>
-                  <a:srgbClr val="FFFFFF"/>
-                </a:solidFill>
-                <a:latin typeface="Microsoft YaHei"/>
-              </a:defRPr>
-            </a:pPr>
-            <a:r>
-              <a:t>维度</a:t>
-            </a:r>
-          </a:p>
-        </p:txBody>
-      </p:sp>
-      <p:sp>
-        <p:nvSpPr>
-          <p:cNvPr id="48" name="Rectangle 47"/>
-          <p:cNvSpPr/>
-          <p:nvPr/>
-        </p:nvSpPr>
-        <p:spPr>
-          <a:xfrm>
-            <a:off x="2468880" y="6309360"/>
-            <a:ext cx="1645920" cy="731520"/>
-          </a:xfrm>
-          <a:prstGeom prst="rect">
-            <a:avLst/>
-          </a:prstGeom>
-          <a:solidFill>
-            <a:srgbClr val="F59E0B"/>
-          </a:solidFill>
-          <a:ln>
-            <a:noFill/>
-          </a:ln>
-        </p:spPr>
-        <p:style>
-          <a:lnRef idx="1">
-            <a:schemeClr val="accent1"/>
-          </a:lnRef>
-          <a:fillRef idx="3">
-            <a:schemeClr val="accent1"/>
-          </a:fillRef>
-          <a:effectRef idx="2">
-            <a:schemeClr val="accent1"/>
-          </a:effectRef>
-          <a:fontRef idx="minor">
-            <a:schemeClr val="lt1"/>
-          </a:fontRef>
-        </p:style>
-        <p:txBody>
-          <a:bodyPr rtlCol="0" anchor="ctr"/>
-          <a:lstStyle/>
-          <a:p>
-            <a:pPr algn="ctr"/>
-          </a:p>
-        </p:txBody>
-      </p:sp>
-      <p:sp>
-        <p:nvSpPr>
-          <p:cNvPr id="49" name="TextBox 48"/>
-          <p:cNvSpPr txBox="1"/>
-          <p:nvPr/>
-        </p:nvSpPr>
-        <p:spPr>
-          <a:xfrm>
-            <a:off x="2468880" y="6400800"/>
-            <a:ext cx="1645920" cy="365760"/>
-          </a:xfrm>
-          <a:prstGeom prst="rect">
-            <a:avLst/>
-          </a:prstGeom>
-          <a:noFill/>
-        </p:spPr>
-        <p:txBody>
-          <a:bodyPr wrap="square">
-            <a:spAutoFit/>
-          </a:bodyPr>
-          <a:lstStyle/>
-          <a:p>
-            <a:pPr algn="ctr">
-              <a:defRPr sz="2400" b="1">
-                <a:solidFill>
-                  <a:srgbClr val="FFFFFF"/>
-                </a:solidFill>
-                <a:latin typeface="Microsoft YaHei"/>
-              </a:defRPr>
-            </a:pPr>
-            <a:r>
-              <a:t>7 类</a:t>
-            </a:r>
-          </a:p>
-        </p:txBody>
-      </p:sp>
-      <p:sp>
-        <p:nvSpPr>
-          <p:cNvPr id="50" name="TextBox 49"/>
-          <p:cNvSpPr txBox="1"/>
-          <p:nvPr/>
-        </p:nvSpPr>
-        <p:spPr>
-          <a:xfrm>
-            <a:off x="2468880" y="6720840"/>
-            <a:ext cx="1645920" cy="274320"/>
-          </a:xfrm>
-          <a:prstGeom prst="rect">
-            <a:avLst/>
-          </a:prstGeom>
-          <a:noFill/>
-        </p:spPr>
-        <p:txBody>
-          <a:bodyPr wrap="square">
-            <a:spAutoFit/>
-          </a:bodyPr>
-          <a:lstStyle/>
-          <a:p>
-            <a:pPr algn="ctr">
-              <a:defRPr sz="1100" b="0">
-                <a:solidFill>
-                  <a:srgbClr val="FFFFFF"/>
-                </a:solidFill>
-                <a:latin typeface="Microsoft YaHei"/>
-              </a:defRPr>
-            </a:pPr>
-            <a:r>
-              <a:t>分类</a:t>
-            </a:r>
-          </a:p>
-        </p:txBody>
-      </p:sp>
-      <p:sp>
-        <p:nvSpPr>
-          <p:cNvPr id="51" name="Rectangle 50"/>
+          <p:cNvPr id="57" name="Rectangle 56"/>
           <p:cNvSpPr/>
           <p:nvPr/>
         </p:nvSpPr>
@@ -8584,7 +8814,7 @@
       </p:sp>
       <p:sp>
         <p:nvSpPr>
-          <p:cNvPr id="52" name="TextBox 51"/>
+          <p:cNvPr id="58" name="TextBox 57"/>
           <p:cNvSpPr txBox="1"/>
           <p:nvPr/>
         </p:nvSpPr>
@@ -8620,7 +8850,7 @@
       </p:sp>
       <p:sp>
         <p:nvSpPr>
-          <p:cNvPr id="53" name="TextBox 52"/>
+          <p:cNvPr id="59" name="TextBox 58"/>
           <p:cNvSpPr txBox="1"/>
           <p:nvPr/>
         </p:nvSpPr>
@@ -8649,7 +8879,7 @@
               </a:defRPr>
             </a:pPr>
             <a:r>
-              <a:t>测试</a:t>
+              <a:t>测试覆盖</a:t>
             </a:r>
           </a:p>
         </p:txBody>
@@ -13807,7 +14037,7 @@
               </a:defRPr>
             </a:pPr>
             <a:r>
-              <a:t>  * 顶层系统架构设计与核心流水线规制</a:t>
+              <a:t>  * 顶层架构：全链路 RAG 流水线规划与模块抽象</a:t>
             </a:r>
           </a:p>
         </p:txBody>
@@ -13843,7 +14073,7 @@
               </a:defRPr>
             </a:pPr>
             <a:r>
-              <a:t>  * embed_store.py: upsert 幂等与 where_document 检索优化</a:t>
+              <a:t>  * embed_store: upsert 幂等 + where_document 过滤</a:t>
             </a:r>
           </a:p>
         </p:txBody>
@@ -13879,7 +14109,7 @@
               </a:defRPr>
             </a:pPr>
             <a:r>
-              <a:t>  * preprocess.py: 四级语义退避分块算法</a:t>
+              <a:t>  * preprocess: 四层语义分块与极短文档拼合</a:t>
             </a:r>
           </a:p>
         </p:txBody>
@@ -13915,7 +14145,7 @@
               </a:defRPr>
             </a:pPr>
             <a:r>
-              <a:t>  * 核心技术攻坚与全链路安全降级回退机制</a:t>
+              <a:t>  * 攻克 Mock 路径穿透隐患与信号防吞机制</a:t>
             </a:r>
           </a:p>
         </p:txBody>
@@ -14073,7 +14303,7 @@
               </a:defRPr>
             </a:pPr>
             <a:r>
-              <a:t>  * 多源离线爬取与 HTML -&gt; MD 规范转换</a:t>
+              <a:t>  * 三源采集：Wikipedia + Stack Overflow + CSDN</a:t>
             </a:r>
           </a:p>
         </p:txBody>
@@ -14109,7 +14339,7 @@
               </a:defRPr>
             </a:pPr>
             <a:r>
-              <a:t>  * 32 线程并发元数据提取（ThreadPoolExecutor）</a:t>
+              <a:t>  * BeautifulSoup + html2text 转为纯净 Markdown</a:t>
             </a:r>
           </a:p>
         </p:txBody>
@@ -14145,7 +14375,7 @@
               </a:defRPr>
             </a:pPr>
             <a:r>
-              <a:t>  * 429 限流退避算法：扰动指数自适应重试</a:t>
+              <a:t>  * 32 线程并发元数据提取（429 指数退避重试）</a:t>
             </a:r>
           </a:p>
         </p:txBody>
@@ -14181,7 +14411,7 @@
               </a:defRPr>
             </a:pPr>
             <a:r>
-              <a:t>  * clean_text(): 标签、实体、控制符、空白四步清洗</a:t>
+              <a:t>  * clean_text 四步流水线：标签→实体→控制符→空白</a:t>
             </a:r>
           </a:p>
         </p:txBody>
@@ -14339,7 +14569,7 @@
               </a:defRPr>
             </a:pPr>
             <a:r>
-              <a:t>  * app/style.css: 流畅毛玻璃与深色微动画重塑</a:t>
+              <a:t>  * Vanilla CSS 毛玻璃 + 深色卡片动画布局</a:t>
             </a:r>
           </a:p>
         </p:txBody>
@@ -14375,7 +14605,7 @@
               </a:defRPr>
             </a:pPr>
             <a:r>
-              <a:t>  * session_state 多轮对话历史状态管理</a:t>
+              <a:t>  * 多轮对话状态机与 Top-K/阈值实时调节</a:t>
             </a:r>
           </a:p>
         </p:txBody>
@@ -14411,7 +14641,7 @@
               </a:defRPr>
             </a:pPr>
             <a:r>
-              <a:t>  * 调试模式折叠面板与 Top-K/阈值滑块参数联动</a:t>
+              <a:t>  * 调试模式剖析面板（余弦得分/分类/年份）</a:t>
             </a:r>
           </a:p>
         </p:txBody>
@@ -14447,7 +14677,7 @@
               </a:defRPr>
             </a:pPr>
             <a:r>
-              <a:t>  * 拖拽动态文档上传入库与 XSS 安全逃逸防护</a:t>
+              <a:t>  * 拖拽上传入库 + XSS 安全 escape 防护</a:t>
             </a:r>
           </a:p>
         </p:txBody>
@@ -14605,7 +14835,7 @@
               </a:defRPr>
             </a:pPr>
             <a:r>
-              <a:t>  * pytest 68 个单测与集成用例覆盖开发 (100% Passed)</a:t>
+              <a:t>  * 19 类 68 个 pytest 测试 (100% Passed)</a:t>
             </a:r>
           </a:p>
         </p:txBody>
@@ -14641,7 +14871,7 @@
               </a:defRPr>
             </a:pPr>
             <a:r>
-              <a:t>  * unittest.mock.patch 离线环境深度解耦</a:t>
+              <a:t>  * Mock 解耦：离线无 API 密钥运行全套测试</a:t>
             </a:r>
           </a:p>
         </p:txBody>
@@ -14677,7 +14907,7 @@
               </a:defRPr>
             </a:pPr>
             <a:r>
-              <a:t>  * 嵌套 YAML、网络中断、系统信号防吞极限边界测试</a:t>
+              <a:t>  * YAML 容错 / API 降级 / 信号防吞边界用例</a:t>
             </a:r>
           </a:p>
         </p:txBody>
@@ -14713,7 +14943,7 @@
               </a:defRPr>
             </a:pPr>
             <a:r>
-              <a:t>  * report.md/README.md/演示 PPT 文稿高标准撰写</a:t>
+              <a:t>  * report.md / README.md / 答辩 PPT 撰写</a:t>
             </a:r>
           </a:p>
         </p:txBody>
@@ -16476,7 +16706,7 @@
               </a:defRPr>
             </a:pPr>
             <a:r>
-              <a:t>代码文档齐全  |  68 个单元测试用例  |  全流程完美复现</a:t>
+              <a:t>报告齐全  |  19 类 68 个测试全覆盖  |  全流程完美复现</a:t>
             </a:r>
           </a:p>
         </p:txBody>
